--- a/PNU-pathfinder/output/발표자료_PNU-Pathfinder.pptx
+++ b/PNU-pathfinder/output/발표자료_PNU-Pathfinder.pptx
@@ -16,6 +16,7 @@
     <p:sldId id="264" r:id="rId15"/>
     <p:sldId id="265" r:id="rId16"/>
     <p:sldId id="266" r:id="rId17"/>
+    <p:sldId id="267" r:id="rId18"/>
   </p:sldIdLst>
   <p:sldSz cx="12188952" cy="6858000" type="screen4x3"/>
   <p:notesSz cx="6858000" cy="9144000"/>
@@ -3415,7 +3416,7 @@
                 </a:solidFill>
                 <a:latin typeface="맑은 고딕"/>
               </a:rPr>
-              <a:t>팀 구성</a:t>
+              <a:t>기대효과 &amp; 차별성</a:t>
             </a:r>
           </a:p>
         </p:txBody>
@@ -3450,7 +3451,7 @@
                 </a:solidFill>
                 <a:latin typeface="맑은 고딕"/>
               </a:rPr>
-              <a:t>TEAM</a:t>
+              <a:t>IMPACT &amp; DIFFERENTIATION</a:t>
             </a:r>
           </a:p>
         </p:txBody>
@@ -3470,7 +3471,7 @@
             <a:avLst/>
           </a:prstGeom>
           <a:solidFill>
-            <a:srgbClr val="F1F5F9"/>
+            <a:srgbClr val="0F172A"/>
           </a:solidFill>
           <a:ln>
             <a:noFill/>
@@ -3507,115 +3508,147 @@
         <p:spPr>
           <a:xfrm>
             <a:off x="457200" y="1463040"/>
-            <a:ext cx="10972800" cy="457200"/>
-          </a:xfrm>
-          <a:prstGeom prst="rect">
-            <a:avLst/>
-          </a:prstGeom>
-          <a:noFill/>
-        </p:spPr>
-        <p:txBody>
-          <a:bodyPr wrap="square">
-            <a:spAutoFit/>
-          </a:bodyPr>
-          <a:lstStyle/>
-          <a:p>
-            <a:pPr algn="ctr"/>
-            <a:r>
-              <a:rPr sz="1800" b="0">
-                <a:solidFill>
-                  <a:srgbClr val="475569"/>
-                </a:solidFill>
-                <a:latin typeface="맑은 고딕"/>
-              </a:rPr>
-              <a:t>SW전공자 + 비전공자 각 1명 이상 포함  |  팀원: [추가 필요]</a:t>
-            </a:r>
-          </a:p>
-        </p:txBody>
-      </p:sp>
-      <p:sp>
-        <p:nvSpPr>
-          <p:cNvPr id="7" name="Rectangle 6"/>
-          <p:cNvSpPr/>
-          <p:nvPr/>
-        </p:nvSpPr>
-        <p:spPr>
-          <a:xfrm>
-            <a:off x="365760" y="2011680"/>
-            <a:ext cx="2743200" cy="4389120"/>
-          </a:xfrm>
-          <a:prstGeom prst="rect">
-            <a:avLst/>
-          </a:prstGeom>
-          <a:solidFill>
-            <a:srgbClr val="FFFFFF"/>
-          </a:solidFill>
-          <a:ln>
-            <a:noFill/>
-          </a:ln>
-        </p:spPr>
-        <p:style>
-          <a:lnRef idx="1">
-            <a:schemeClr val="accent1"/>
-          </a:lnRef>
-          <a:fillRef idx="3">
-            <a:schemeClr val="accent1"/>
-          </a:fillRef>
-          <a:effectRef idx="2">
-            <a:schemeClr val="accent1"/>
-          </a:effectRef>
-          <a:fontRef idx="minor">
-            <a:schemeClr val="lt1"/>
-          </a:fontRef>
-        </p:style>
-        <p:txBody>
-          <a:bodyPr rtlCol="0" anchor="ctr"/>
-          <a:lstStyle/>
-          <a:p>
-            <a:pPr algn="ctr"/>
-          </a:p>
-        </p:txBody>
-      </p:sp>
-      <p:sp>
-        <p:nvSpPr>
-          <p:cNvPr id="8" name="Rectangle 7"/>
-          <p:cNvSpPr/>
-          <p:nvPr/>
-        </p:nvSpPr>
-        <p:spPr>
-          <a:xfrm>
-            <a:off x="365760" y="2011680"/>
-            <a:ext cx="2743200" cy="548640"/>
-          </a:xfrm>
-          <a:prstGeom prst="rect">
-            <a:avLst/>
-          </a:prstGeom>
-          <a:solidFill>
-            <a:srgbClr val="003876"/>
-          </a:solidFill>
-          <a:ln>
-            <a:noFill/>
-          </a:ln>
-        </p:spPr>
-        <p:style>
-          <a:lnRef idx="1">
-            <a:schemeClr val="accent1"/>
-          </a:lnRef>
-          <a:fillRef idx="3">
-            <a:schemeClr val="accent1"/>
-          </a:fillRef>
-          <a:effectRef idx="2">
-            <a:schemeClr val="accent1"/>
-          </a:effectRef>
-          <a:fontRef idx="minor">
-            <a:schemeClr val="lt1"/>
-          </a:fontRef>
-        </p:style>
-        <p:txBody>
-          <a:bodyPr rtlCol="0" anchor="ctr"/>
-          <a:lstStyle/>
-          <a:p>
-            <a:pPr algn="ctr"/>
+            <a:ext cx="5486400" cy="457200"/>
+          </a:xfrm>
+          <a:prstGeom prst="rect">
+            <a:avLst/>
+          </a:prstGeom>
+          <a:noFill/>
+        </p:spPr>
+        <p:txBody>
+          <a:bodyPr wrap="square">
+            <a:spAutoFit/>
+          </a:bodyPr>
+          <a:lstStyle/>
+          <a:p>
+            <a:pPr algn="l"/>
+            <a:r>
+              <a:rPr sz="2200" b="1">
+                <a:solidFill>
+                  <a:srgbClr val="10B981"/>
+                </a:solidFill>
+                <a:latin typeface="맑은 고딕"/>
+              </a:rPr>
+              <a:t>차별성</a:t>
+            </a:r>
+          </a:p>
+        </p:txBody>
+      </p:sp>
+      <p:sp>
+        <p:nvSpPr>
+          <p:cNvPr id="7" name="TextBox 6"/>
+          <p:cNvSpPr txBox="1"/>
+          <p:nvPr/>
+        </p:nvSpPr>
+        <p:spPr>
+          <a:xfrm>
+            <a:off x="640080" y="2194560"/>
+            <a:ext cx="5120640" cy="4023360"/>
+          </a:xfrm>
+          <a:prstGeom prst="rect">
+            <a:avLst/>
+          </a:prstGeom>
+          <a:noFill/>
+        </p:spPr>
+        <p:txBody>
+          <a:bodyPr wrap="square">
+            <a:spAutoFit/>
+          </a:bodyPr>
+          <a:lstStyle/>
+          <a:p>
+            <a:pPr algn="l"/>
+            <a:r>
+              <a:rPr sz="1600">
+                <a:solidFill>
+                  <a:srgbClr val="FFFFFF"/>
+                </a:solidFill>
+                <a:latin typeface="맑은 고딕"/>
+              </a:rPr>
+              <a:t>•  학업·졸업·진로·이력서를 하나의 플랫폼에서 통합 관리</a:t>
+            </a:r>
+          </a:p>
+          <a:p>
+            <a:pPr algn="l"/>
+            <a:r>
+              <a:rPr sz="1600">
+                <a:solidFill>
+                  <a:srgbClr val="FFFFFF"/>
+                </a:solidFill>
+                <a:latin typeface="맑은 고딕"/>
+              </a:rPr>
+              <a:t>•  학생별 이수 현황 기반 맞춤형 수강 로드맵</a:t>
+            </a:r>
+          </a:p>
+          <a:p>
+            <a:pPr algn="l"/>
+            <a:r>
+              <a:rPr sz="1600">
+                <a:solidFill>
+                  <a:srgbClr val="FFFFFF"/>
+                </a:solidFill>
+                <a:latin typeface="맑은 고딕"/>
+              </a:rPr>
+              <a:t>•  정형 데이터 분석 + 생성형 AI 설명 결합 (신뢰성 확보)</a:t>
+            </a:r>
+          </a:p>
+          <a:p>
+            <a:pPr algn="l"/>
+            <a:r>
+              <a:rPr sz="1600">
+                <a:solidFill>
+                  <a:srgbClr val="FFFFFF"/>
+                </a:solidFill>
+                <a:latin typeface="맑은 고딕"/>
+              </a:rPr>
+              <a:t>•  정적 PDF가 아닌 인터랙티브 로드맵 UI</a:t>
+            </a:r>
+          </a:p>
+          <a:p>
+            <a:pPr algn="l"/>
+            <a:r>
+              <a:rPr sz="1600">
+                <a:solidFill>
+                  <a:srgbClr val="FFFFFF"/>
+                </a:solidFill>
+                <a:latin typeface="맑은 고딕"/>
+              </a:rPr>
+              <a:t>•  복수전공·전과 시나리오 분석 지원</a:t>
+            </a:r>
+          </a:p>
+        </p:txBody>
+      </p:sp>
+      <p:sp>
+        <p:nvSpPr>
+          <p:cNvPr id="8" name="TextBox 7"/>
+          <p:cNvSpPr txBox="1"/>
+          <p:nvPr/>
+        </p:nvSpPr>
+        <p:spPr>
+          <a:xfrm>
+            <a:off x="6400800" y="1463040"/>
+            <a:ext cx="5486400" cy="457200"/>
+          </a:xfrm>
+          <a:prstGeom prst="rect">
+            <a:avLst/>
+          </a:prstGeom>
+          <a:noFill/>
+        </p:spPr>
+        <p:txBody>
+          <a:bodyPr wrap="square">
+            <a:spAutoFit/>
+          </a:bodyPr>
+          <a:lstStyle/>
+          <a:p>
+            <a:pPr algn="l"/>
+            <a:r>
+              <a:rPr sz="2200" b="1">
+                <a:solidFill>
+                  <a:srgbClr val="10B981"/>
+                </a:solidFill>
+                <a:latin typeface="맑은 고딕"/>
+              </a:rPr>
+              <a:t>기대효과</a:t>
+            </a:r>
           </a:p>
         </p:txBody>
       </p:sp>
@@ -3627,1092 +3660,77 @@
         </p:nvSpPr>
         <p:spPr>
           <a:xfrm>
-            <a:off x="365760" y="2057400"/>
-            <a:ext cx="2743200" cy="457200"/>
-          </a:xfrm>
-          <a:prstGeom prst="rect">
-            <a:avLst/>
-          </a:prstGeom>
-          <a:noFill/>
-        </p:spPr>
-        <p:txBody>
-          <a:bodyPr wrap="square">
-            <a:spAutoFit/>
-          </a:bodyPr>
-          <a:lstStyle/>
-          <a:p>
-            <a:pPr algn="ctr"/>
-            <a:r>
-              <a:rPr sz="1800" b="1">
+            <a:off x="6583680" y="2194560"/>
+            <a:ext cx="5120640" cy="4023360"/>
+          </a:xfrm>
+          <a:prstGeom prst="rect">
+            <a:avLst/>
+          </a:prstGeom>
+          <a:noFill/>
+        </p:spPr>
+        <p:txBody>
+          <a:bodyPr wrap="square">
+            <a:spAutoFit/>
+          </a:bodyPr>
+          <a:lstStyle/>
+          <a:p>
+            <a:pPr algn="l"/>
+            <a:r>
+              <a:rPr sz="1600">
                 <a:solidFill>
                   <a:srgbClr val="FFFFFF"/>
                 </a:solidFill>
                 <a:latin typeface="맑은 고딕"/>
               </a:rPr>
-              <a:t>PM / 기획</a:t>
-            </a:r>
-          </a:p>
-        </p:txBody>
-      </p:sp>
-      <p:sp>
-        <p:nvSpPr>
-          <p:cNvPr id="10" name="TextBox 9"/>
-          <p:cNvSpPr txBox="1"/>
-          <p:nvPr/>
-        </p:nvSpPr>
-        <p:spPr>
-          <a:xfrm>
-            <a:off x="365760" y="2606040"/>
-            <a:ext cx="2743200" cy="320040"/>
-          </a:xfrm>
-          <a:prstGeom prst="rect">
-            <a:avLst/>
-          </a:prstGeom>
-          <a:noFill/>
-        </p:spPr>
-        <p:txBody>
-          <a:bodyPr wrap="square">
-            <a:spAutoFit/>
-          </a:bodyPr>
-          <a:lstStyle/>
-          <a:p>
-            <a:pPr algn="ctr"/>
-            <a:r>
-              <a:rPr sz="1200" b="0">
-                <a:solidFill>
-                  <a:srgbClr val="10B981"/>
-                </a:solidFill>
-                <a:latin typeface="맑은 고딕"/>
-              </a:rPr>
-              <a:t>SW전공자</a:t>
-            </a:r>
-          </a:p>
-        </p:txBody>
-      </p:sp>
-      <p:sp>
-        <p:nvSpPr>
-          <p:cNvPr id="11" name="TextBox 10"/>
-          <p:cNvSpPr txBox="1"/>
-          <p:nvPr/>
-        </p:nvSpPr>
-        <p:spPr>
-          <a:xfrm>
-            <a:off x="502920" y="3017520"/>
-            <a:ext cx="2468880" cy="457200"/>
-          </a:xfrm>
-          <a:prstGeom prst="rect">
-            <a:avLst/>
-          </a:prstGeom>
-          <a:noFill/>
-        </p:spPr>
-        <p:txBody>
-          <a:bodyPr wrap="square">
-            <a:spAutoFit/>
-          </a:bodyPr>
-          <a:lstStyle/>
+              <a:t>•  수강 계획 수립 시간 단축</a:t>
+            </a:r>
+          </a:p>
           <a:p>
             <a:pPr algn="l"/>
             <a:r>
-              <a:rPr sz="1400" b="0">
-                <a:solidFill>
-                  <a:srgbClr val="0F172A"/>
-                </a:solidFill>
-                <a:latin typeface="맑은 고딕"/>
-              </a:rPr>
-              <a:t>• 프로젝트 관리</a:t>
-            </a:r>
-          </a:p>
-        </p:txBody>
-      </p:sp>
-      <p:sp>
-        <p:nvSpPr>
-          <p:cNvPr id="12" name="TextBox 11"/>
-          <p:cNvSpPr txBox="1"/>
-          <p:nvPr/>
-        </p:nvSpPr>
-        <p:spPr>
-          <a:xfrm>
-            <a:off x="502920" y="3520439"/>
-            <a:ext cx="2468880" cy="457200"/>
-          </a:xfrm>
-          <a:prstGeom prst="rect">
-            <a:avLst/>
-          </a:prstGeom>
-          <a:noFill/>
-        </p:spPr>
-        <p:txBody>
-          <a:bodyPr wrap="square">
-            <a:spAutoFit/>
-          </a:bodyPr>
-          <a:lstStyle/>
+              <a:rPr sz="1600">
+                <a:solidFill>
+                  <a:srgbClr val="FFFFFF"/>
+                </a:solidFill>
+                <a:latin typeface="맑은 고딕"/>
+              </a:rPr>
+              <a:t>•  졸업요건 누락 방지</a:t>
+            </a:r>
+          </a:p>
           <a:p>
             <a:pPr algn="l"/>
             <a:r>
-              <a:rPr sz="1400" b="0">
-                <a:solidFill>
-                  <a:srgbClr val="0F172A"/>
-                </a:solidFill>
-                <a:latin typeface="맑은 고딕"/>
-              </a:rPr>
-              <a:t>• 문서·발표자료 작성</a:t>
-            </a:r>
-          </a:p>
-        </p:txBody>
-      </p:sp>
-      <p:sp>
-        <p:nvSpPr>
-          <p:cNvPr id="13" name="TextBox 12"/>
-          <p:cNvSpPr txBox="1"/>
-          <p:nvPr/>
-        </p:nvSpPr>
-        <p:spPr>
-          <a:xfrm>
-            <a:off x="502920" y="4023360"/>
-            <a:ext cx="2468880" cy="457200"/>
-          </a:xfrm>
-          <a:prstGeom prst="rect">
-            <a:avLst/>
-          </a:prstGeom>
-          <a:noFill/>
-        </p:spPr>
-        <p:txBody>
-          <a:bodyPr wrap="square">
-            <a:spAutoFit/>
-          </a:bodyPr>
-          <a:lstStyle/>
+              <a:rPr sz="1600">
+                <a:solidFill>
+                  <a:srgbClr val="FFFFFF"/>
+                </a:solidFill>
+                <a:latin typeface="맑은 고딕"/>
+              </a:rPr>
+              <a:t>•  진로 준비 체계화</a:t>
+            </a:r>
+          </a:p>
           <a:p>
             <a:pPr algn="l"/>
             <a:r>
-              <a:rPr sz="1400" b="0">
-                <a:solidFill>
-                  <a:srgbClr val="0F172A"/>
-                </a:solidFill>
-                <a:latin typeface="맑은 고딕"/>
-              </a:rPr>
-              <a:t>• AI 도구 총괄 활용</a:t>
-            </a:r>
-          </a:p>
-        </p:txBody>
-      </p:sp>
-      <p:sp>
-        <p:nvSpPr>
-          <p:cNvPr id="14" name="TextBox 13"/>
-          <p:cNvSpPr txBox="1"/>
-          <p:nvPr/>
-        </p:nvSpPr>
-        <p:spPr>
-          <a:xfrm>
-            <a:off x="502920" y="4526280"/>
-            <a:ext cx="2468880" cy="457200"/>
-          </a:xfrm>
-          <a:prstGeom prst="rect">
-            <a:avLst/>
-          </a:prstGeom>
-          <a:noFill/>
-        </p:spPr>
-        <p:txBody>
-          <a:bodyPr wrap="square">
-            <a:spAutoFit/>
-          </a:bodyPr>
-          <a:lstStyle/>
+              <a:rPr sz="1600">
+                <a:solidFill>
+                  <a:srgbClr val="FFFFFF"/>
+                </a:solidFill>
+                <a:latin typeface="맑은 고딕"/>
+              </a:rPr>
+              <a:t>•  편입·복학생 적응 지원</a:t>
+            </a:r>
+          </a:p>
           <a:p>
             <a:pPr algn="l"/>
             <a:r>
-              <a:rPr sz="1400" b="0">
-                <a:solidFill>
-                  <a:srgbClr val="0F172A"/>
-                </a:solidFill>
-                <a:latin typeface="맑은 고딕"/>
-              </a:rPr>
-              <a:t>• GitHub 관리</a:t>
-            </a:r>
-          </a:p>
-        </p:txBody>
-      </p:sp>
-      <p:sp>
-        <p:nvSpPr>
-          <p:cNvPr id="15" name="Rectangle 14"/>
-          <p:cNvSpPr/>
-          <p:nvPr/>
-        </p:nvSpPr>
-        <p:spPr>
-          <a:xfrm>
-            <a:off x="3291840" y="2011680"/>
-            <a:ext cx="2743200" cy="4389120"/>
-          </a:xfrm>
-          <a:prstGeom prst="rect">
-            <a:avLst/>
-          </a:prstGeom>
-          <a:solidFill>
-            <a:srgbClr val="FFFFFF"/>
-          </a:solidFill>
-          <a:ln>
-            <a:noFill/>
-          </a:ln>
-        </p:spPr>
-        <p:style>
-          <a:lnRef idx="1">
-            <a:schemeClr val="accent1"/>
-          </a:lnRef>
-          <a:fillRef idx="3">
-            <a:schemeClr val="accent1"/>
-          </a:fillRef>
-          <a:effectRef idx="2">
-            <a:schemeClr val="accent1"/>
-          </a:effectRef>
-          <a:fontRef idx="minor">
-            <a:schemeClr val="lt1"/>
-          </a:fontRef>
-        </p:style>
-        <p:txBody>
-          <a:bodyPr rtlCol="0" anchor="ctr"/>
-          <a:lstStyle/>
-          <a:p>
-            <a:pPr algn="ctr"/>
-          </a:p>
-        </p:txBody>
-      </p:sp>
-      <p:sp>
-        <p:nvSpPr>
-          <p:cNvPr id="16" name="Rectangle 15"/>
-          <p:cNvSpPr/>
-          <p:nvPr/>
-        </p:nvSpPr>
-        <p:spPr>
-          <a:xfrm>
-            <a:off x="3291840" y="2011680"/>
-            <a:ext cx="2743200" cy="548640"/>
-          </a:xfrm>
-          <a:prstGeom prst="rect">
-            <a:avLst/>
-          </a:prstGeom>
-          <a:solidFill>
-            <a:srgbClr val="003876"/>
-          </a:solidFill>
-          <a:ln>
-            <a:noFill/>
-          </a:ln>
-        </p:spPr>
-        <p:style>
-          <a:lnRef idx="1">
-            <a:schemeClr val="accent1"/>
-          </a:lnRef>
-          <a:fillRef idx="3">
-            <a:schemeClr val="accent1"/>
-          </a:fillRef>
-          <a:effectRef idx="2">
-            <a:schemeClr val="accent1"/>
-          </a:effectRef>
-          <a:fontRef idx="minor">
-            <a:schemeClr val="lt1"/>
-          </a:fontRef>
-        </p:style>
-        <p:txBody>
-          <a:bodyPr rtlCol="0" anchor="ctr"/>
-          <a:lstStyle/>
-          <a:p>
-            <a:pPr algn="ctr"/>
-          </a:p>
-        </p:txBody>
-      </p:sp>
-      <p:sp>
-        <p:nvSpPr>
-          <p:cNvPr id="17" name="TextBox 16"/>
-          <p:cNvSpPr txBox="1"/>
-          <p:nvPr/>
-        </p:nvSpPr>
-        <p:spPr>
-          <a:xfrm>
-            <a:off x="3291840" y="2057400"/>
-            <a:ext cx="2743200" cy="457200"/>
-          </a:xfrm>
-          <a:prstGeom prst="rect">
-            <a:avLst/>
-          </a:prstGeom>
-          <a:noFill/>
-        </p:spPr>
-        <p:txBody>
-          <a:bodyPr wrap="square">
-            <a:spAutoFit/>
-          </a:bodyPr>
-          <a:lstStyle/>
-          <a:p>
-            <a:pPr algn="ctr"/>
-            <a:r>
-              <a:rPr sz="1800" b="1">
+              <a:rPr sz="1600">
                 <a:solidFill>
                   <a:srgbClr val="FFFFFF"/>
                 </a:solidFill>
                 <a:latin typeface="맑은 고딕"/>
               </a:rPr>
-              <a:t>Backend</a:t>
-            </a:r>
-          </a:p>
-        </p:txBody>
-      </p:sp>
-      <p:sp>
-        <p:nvSpPr>
-          <p:cNvPr id="18" name="TextBox 17"/>
-          <p:cNvSpPr txBox="1"/>
-          <p:nvPr/>
-        </p:nvSpPr>
-        <p:spPr>
-          <a:xfrm>
-            <a:off x="3291840" y="2606040"/>
-            <a:ext cx="2743200" cy="320040"/>
-          </a:xfrm>
-          <a:prstGeom prst="rect">
-            <a:avLst/>
-          </a:prstGeom>
-          <a:noFill/>
-        </p:spPr>
-        <p:txBody>
-          <a:bodyPr wrap="square">
-            <a:spAutoFit/>
-          </a:bodyPr>
-          <a:lstStyle/>
-          <a:p>
-            <a:pPr algn="ctr"/>
-            <a:r>
-              <a:rPr sz="1200" b="0">
-                <a:solidFill>
-                  <a:srgbClr val="10B981"/>
-                </a:solidFill>
-                <a:latin typeface="맑은 고딕"/>
-              </a:rPr>
-              <a:t>SW전공자</a:t>
-            </a:r>
-          </a:p>
-        </p:txBody>
-      </p:sp>
-      <p:sp>
-        <p:nvSpPr>
-          <p:cNvPr id="19" name="TextBox 18"/>
-          <p:cNvSpPr txBox="1"/>
-          <p:nvPr/>
-        </p:nvSpPr>
-        <p:spPr>
-          <a:xfrm>
-            <a:off x="3429000" y="3017520"/>
-            <a:ext cx="2468880" cy="457200"/>
-          </a:xfrm>
-          <a:prstGeom prst="rect">
-            <a:avLst/>
-          </a:prstGeom>
-          <a:noFill/>
-        </p:spPr>
-        <p:txBody>
-          <a:bodyPr wrap="square">
-            <a:spAutoFit/>
-          </a:bodyPr>
-          <a:lstStyle/>
-          <a:p>
-            <a:pPr algn="l"/>
-            <a:r>
-              <a:rPr sz="1400" b="0">
-                <a:solidFill>
-                  <a:srgbClr val="0F172A"/>
-                </a:solidFill>
-                <a:latin typeface="맑은 고딕"/>
-              </a:rPr>
-              <a:t>• FastAPI 서버 개발</a:t>
-            </a:r>
-          </a:p>
-        </p:txBody>
-      </p:sp>
-      <p:sp>
-        <p:nvSpPr>
-          <p:cNvPr id="20" name="TextBox 19"/>
-          <p:cNvSpPr txBox="1"/>
-          <p:nvPr/>
-        </p:nvSpPr>
-        <p:spPr>
-          <a:xfrm>
-            <a:off x="3429000" y="3520439"/>
-            <a:ext cx="2468880" cy="457200"/>
-          </a:xfrm>
-          <a:prstGeom prst="rect">
-            <a:avLst/>
-          </a:prstGeom>
-          <a:noFill/>
-        </p:spPr>
-        <p:txBody>
-          <a:bodyPr wrap="square">
-            <a:spAutoFit/>
-          </a:bodyPr>
-          <a:lstStyle/>
-          <a:p>
-            <a:pPr algn="l"/>
-            <a:r>
-              <a:rPr sz="1400" b="0">
-                <a:solidFill>
-                  <a:srgbClr val="0F172A"/>
-                </a:solidFill>
-                <a:latin typeface="맑은 고딕"/>
-              </a:rPr>
-              <a:t>• DB 설계 및 구현</a:t>
-            </a:r>
-          </a:p>
-        </p:txBody>
-      </p:sp>
-      <p:sp>
-        <p:nvSpPr>
-          <p:cNvPr id="21" name="TextBox 20"/>
-          <p:cNvSpPr txBox="1"/>
-          <p:nvPr/>
-        </p:nvSpPr>
-        <p:spPr>
-          <a:xfrm>
-            <a:off x="3429000" y="4023360"/>
-            <a:ext cx="2468880" cy="457200"/>
-          </a:xfrm>
-          <a:prstGeom prst="rect">
-            <a:avLst/>
-          </a:prstGeom>
-          <a:noFill/>
-        </p:spPr>
-        <p:txBody>
-          <a:bodyPr wrap="square">
-            <a:spAutoFit/>
-          </a:bodyPr>
-          <a:lstStyle/>
-          <a:p>
-            <a:pPr algn="l"/>
-            <a:r>
-              <a:rPr sz="1400" b="0">
-                <a:solidFill>
-                  <a:srgbClr val="0F172A"/>
-                </a:solidFill>
-                <a:latin typeface="맑은 고딕"/>
-              </a:rPr>
-              <a:t>• 추천 로직 구현</a:t>
-            </a:r>
-          </a:p>
-        </p:txBody>
-      </p:sp>
-      <p:sp>
-        <p:nvSpPr>
-          <p:cNvPr id="22" name="TextBox 21"/>
-          <p:cNvSpPr txBox="1"/>
-          <p:nvPr/>
-        </p:nvSpPr>
-        <p:spPr>
-          <a:xfrm>
-            <a:off x="3429000" y="4526280"/>
-            <a:ext cx="2468880" cy="457200"/>
-          </a:xfrm>
-          <a:prstGeom prst="rect">
-            <a:avLst/>
-          </a:prstGeom>
-          <a:noFill/>
-        </p:spPr>
-        <p:txBody>
-          <a:bodyPr wrap="square">
-            <a:spAutoFit/>
-          </a:bodyPr>
-          <a:lstStyle/>
-          <a:p>
-            <a:pPr algn="l"/>
-            <a:r>
-              <a:rPr sz="1400" b="0">
-                <a:solidFill>
-                  <a:srgbClr val="0F172A"/>
-                </a:solidFill>
-                <a:latin typeface="맑은 고딕"/>
-              </a:rPr>
-              <a:t>• OpenAI API 연동</a:t>
-            </a:r>
-          </a:p>
-        </p:txBody>
-      </p:sp>
-      <p:sp>
-        <p:nvSpPr>
-          <p:cNvPr id="23" name="Rectangle 22"/>
-          <p:cNvSpPr/>
-          <p:nvPr/>
-        </p:nvSpPr>
-        <p:spPr>
-          <a:xfrm>
-            <a:off x="6217920" y="2011680"/>
-            <a:ext cx="2743200" cy="4389120"/>
-          </a:xfrm>
-          <a:prstGeom prst="rect">
-            <a:avLst/>
-          </a:prstGeom>
-          <a:solidFill>
-            <a:srgbClr val="FFFFFF"/>
-          </a:solidFill>
-          <a:ln>
-            <a:noFill/>
-          </a:ln>
-        </p:spPr>
-        <p:style>
-          <a:lnRef idx="1">
-            <a:schemeClr val="accent1"/>
-          </a:lnRef>
-          <a:fillRef idx="3">
-            <a:schemeClr val="accent1"/>
-          </a:fillRef>
-          <a:effectRef idx="2">
-            <a:schemeClr val="accent1"/>
-          </a:effectRef>
-          <a:fontRef idx="minor">
-            <a:schemeClr val="lt1"/>
-          </a:fontRef>
-        </p:style>
-        <p:txBody>
-          <a:bodyPr rtlCol="0" anchor="ctr"/>
-          <a:lstStyle/>
-          <a:p>
-            <a:pPr algn="ctr"/>
-          </a:p>
-        </p:txBody>
-      </p:sp>
-      <p:sp>
-        <p:nvSpPr>
-          <p:cNvPr id="24" name="Rectangle 23"/>
-          <p:cNvSpPr/>
-          <p:nvPr/>
-        </p:nvSpPr>
-        <p:spPr>
-          <a:xfrm>
-            <a:off x="6217920" y="2011680"/>
-            <a:ext cx="2743200" cy="548640"/>
-          </a:xfrm>
-          <a:prstGeom prst="rect">
-            <a:avLst/>
-          </a:prstGeom>
-          <a:solidFill>
-            <a:srgbClr val="003876"/>
-          </a:solidFill>
-          <a:ln>
-            <a:noFill/>
-          </a:ln>
-        </p:spPr>
-        <p:style>
-          <a:lnRef idx="1">
-            <a:schemeClr val="accent1"/>
-          </a:lnRef>
-          <a:fillRef idx="3">
-            <a:schemeClr val="accent1"/>
-          </a:fillRef>
-          <a:effectRef idx="2">
-            <a:schemeClr val="accent1"/>
-          </a:effectRef>
-          <a:fontRef idx="minor">
-            <a:schemeClr val="lt1"/>
-          </a:fontRef>
-        </p:style>
-        <p:txBody>
-          <a:bodyPr rtlCol="0" anchor="ctr"/>
-          <a:lstStyle/>
-          <a:p>
-            <a:pPr algn="ctr"/>
-          </a:p>
-        </p:txBody>
-      </p:sp>
-      <p:sp>
-        <p:nvSpPr>
-          <p:cNvPr id="25" name="TextBox 24"/>
-          <p:cNvSpPr txBox="1"/>
-          <p:nvPr/>
-        </p:nvSpPr>
-        <p:spPr>
-          <a:xfrm>
-            <a:off x="6217920" y="2057400"/>
-            <a:ext cx="2743200" cy="457200"/>
-          </a:xfrm>
-          <a:prstGeom prst="rect">
-            <a:avLst/>
-          </a:prstGeom>
-          <a:noFill/>
-        </p:spPr>
-        <p:txBody>
-          <a:bodyPr wrap="square">
-            <a:spAutoFit/>
-          </a:bodyPr>
-          <a:lstStyle/>
-          <a:p>
-            <a:pPr algn="ctr"/>
-            <a:r>
-              <a:rPr sz="1800" b="1">
-                <a:solidFill>
-                  <a:srgbClr val="FFFFFF"/>
-                </a:solidFill>
-                <a:latin typeface="맑은 고딕"/>
-              </a:rPr>
-              <a:t>Frontend</a:t>
-            </a:r>
-          </a:p>
-        </p:txBody>
-      </p:sp>
-      <p:sp>
-        <p:nvSpPr>
-          <p:cNvPr id="26" name="TextBox 25"/>
-          <p:cNvSpPr txBox="1"/>
-          <p:nvPr/>
-        </p:nvSpPr>
-        <p:spPr>
-          <a:xfrm>
-            <a:off x="6217920" y="2606040"/>
-            <a:ext cx="2743200" cy="320040"/>
-          </a:xfrm>
-          <a:prstGeom prst="rect">
-            <a:avLst/>
-          </a:prstGeom>
-          <a:noFill/>
-        </p:spPr>
-        <p:txBody>
-          <a:bodyPr wrap="square">
-            <a:spAutoFit/>
-          </a:bodyPr>
-          <a:lstStyle/>
-          <a:p>
-            <a:pPr algn="ctr"/>
-            <a:r>
-              <a:rPr sz="1200" b="0">
-                <a:solidFill>
-                  <a:srgbClr val="10B981"/>
-                </a:solidFill>
-                <a:latin typeface="맑은 고딕"/>
-              </a:rPr>
-              <a:t>SW전공자 또는 비전공자</a:t>
-            </a:r>
-          </a:p>
-        </p:txBody>
-      </p:sp>
-      <p:sp>
-        <p:nvSpPr>
-          <p:cNvPr id="27" name="TextBox 26"/>
-          <p:cNvSpPr txBox="1"/>
-          <p:nvPr/>
-        </p:nvSpPr>
-        <p:spPr>
-          <a:xfrm>
-            <a:off x="6355080" y="3017520"/>
-            <a:ext cx="2468880" cy="457200"/>
-          </a:xfrm>
-          <a:prstGeom prst="rect">
-            <a:avLst/>
-          </a:prstGeom>
-          <a:noFill/>
-        </p:spPr>
-        <p:txBody>
-          <a:bodyPr wrap="square">
-            <a:spAutoFit/>
-          </a:bodyPr>
-          <a:lstStyle/>
-          <a:p>
-            <a:pPr algn="l"/>
-            <a:r>
-              <a:rPr sz="1400" b="0">
-                <a:solidFill>
-                  <a:srgbClr val="0F172A"/>
-                </a:solidFill>
-                <a:latin typeface="맑은 고딕"/>
-              </a:rPr>
-              <a:t>• React UI 개발</a:t>
-            </a:r>
-          </a:p>
-        </p:txBody>
-      </p:sp>
-      <p:sp>
-        <p:nvSpPr>
-          <p:cNvPr id="28" name="TextBox 27"/>
-          <p:cNvSpPr txBox="1"/>
-          <p:nvPr/>
-        </p:nvSpPr>
-        <p:spPr>
-          <a:xfrm>
-            <a:off x="6355080" y="3520439"/>
-            <a:ext cx="2468880" cy="457200"/>
-          </a:xfrm>
-          <a:prstGeom prst="rect">
-            <a:avLst/>
-          </a:prstGeom>
-          <a:noFill/>
-        </p:spPr>
-        <p:txBody>
-          <a:bodyPr wrap="square">
-            <a:spAutoFit/>
-          </a:bodyPr>
-          <a:lstStyle/>
-          <a:p>
-            <a:pPr algn="l"/>
-            <a:r>
-              <a:rPr sz="1400" b="0">
-                <a:solidFill>
-                  <a:srgbClr val="0F172A"/>
-                </a:solidFill>
-                <a:latin typeface="맑은 고딕"/>
-              </a:rPr>
-              <a:t>• 화면 설계·구현</a:t>
-            </a:r>
-          </a:p>
-        </p:txBody>
-      </p:sp>
-      <p:sp>
-        <p:nvSpPr>
-          <p:cNvPr id="29" name="TextBox 28"/>
-          <p:cNvSpPr txBox="1"/>
-          <p:nvPr/>
-        </p:nvSpPr>
-        <p:spPr>
-          <a:xfrm>
-            <a:off x="6355080" y="4023360"/>
-            <a:ext cx="2468880" cy="457200"/>
-          </a:xfrm>
-          <a:prstGeom prst="rect">
-            <a:avLst/>
-          </a:prstGeom>
-          <a:noFill/>
-        </p:spPr>
-        <p:txBody>
-          <a:bodyPr wrap="square">
-            <a:spAutoFit/>
-          </a:bodyPr>
-          <a:lstStyle/>
-          <a:p>
-            <a:pPr algn="l"/>
-            <a:r>
-              <a:rPr sz="1400" b="0">
-                <a:solidFill>
-                  <a:srgbClr val="0F172A"/>
-                </a:solidFill>
-                <a:latin typeface="맑은 고딕"/>
-              </a:rPr>
-              <a:t>• API 연동</a:t>
-            </a:r>
-          </a:p>
-        </p:txBody>
-      </p:sp>
-      <p:sp>
-        <p:nvSpPr>
-          <p:cNvPr id="30" name="TextBox 29"/>
-          <p:cNvSpPr txBox="1"/>
-          <p:nvPr/>
-        </p:nvSpPr>
-        <p:spPr>
-          <a:xfrm>
-            <a:off x="6355080" y="4526280"/>
-            <a:ext cx="2468880" cy="457200"/>
-          </a:xfrm>
-          <a:prstGeom prst="rect">
-            <a:avLst/>
-          </a:prstGeom>
-          <a:noFill/>
-        </p:spPr>
-        <p:txBody>
-          <a:bodyPr wrap="square">
-            <a:spAutoFit/>
-          </a:bodyPr>
-          <a:lstStyle/>
-          <a:p>
-            <a:pPr algn="l"/>
-            <a:r>
-              <a:rPr sz="1400" b="0">
-                <a:solidFill>
-                  <a:srgbClr val="0F172A"/>
-                </a:solidFill>
-                <a:latin typeface="맑은 고딕"/>
-              </a:rPr>
-              <a:t>• UX 개선</a:t>
-            </a:r>
-          </a:p>
-        </p:txBody>
-      </p:sp>
-      <p:sp>
-        <p:nvSpPr>
-          <p:cNvPr id="31" name="Rectangle 30"/>
-          <p:cNvSpPr/>
-          <p:nvPr/>
-        </p:nvSpPr>
-        <p:spPr>
-          <a:xfrm>
-            <a:off x="9144000" y="2011680"/>
-            <a:ext cx="2743200" cy="4389120"/>
-          </a:xfrm>
-          <a:prstGeom prst="rect">
-            <a:avLst/>
-          </a:prstGeom>
-          <a:solidFill>
-            <a:srgbClr val="FFFFFF"/>
-          </a:solidFill>
-          <a:ln>
-            <a:noFill/>
-          </a:ln>
-        </p:spPr>
-        <p:style>
-          <a:lnRef idx="1">
-            <a:schemeClr val="accent1"/>
-          </a:lnRef>
-          <a:fillRef idx="3">
-            <a:schemeClr val="accent1"/>
-          </a:fillRef>
-          <a:effectRef idx="2">
-            <a:schemeClr val="accent1"/>
-          </a:effectRef>
-          <a:fontRef idx="minor">
-            <a:schemeClr val="lt1"/>
-          </a:fontRef>
-        </p:style>
-        <p:txBody>
-          <a:bodyPr rtlCol="0" anchor="ctr"/>
-          <a:lstStyle/>
-          <a:p>
-            <a:pPr algn="ctr"/>
-          </a:p>
-        </p:txBody>
-      </p:sp>
-      <p:sp>
-        <p:nvSpPr>
-          <p:cNvPr id="32" name="Rectangle 31"/>
-          <p:cNvSpPr/>
-          <p:nvPr/>
-        </p:nvSpPr>
-        <p:spPr>
-          <a:xfrm>
-            <a:off x="9144000" y="2011680"/>
-            <a:ext cx="2743200" cy="548640"/>
-          </a:xfrm>
-          <a:prstGeom prst="rect">
-            <a:avLst/>
-          </a:prstGeom>
-          <a:solidFill>
-            <a:srgbClr val="003876"/>
-          </a:solidFill>
-          <a:ln>
-            <a:noFill/>
-          </a:ln>
-        </p:spPr>
-        <p:style>
-          <a:lnRef idx="1">
-            <a:schemeClr val="accent1"/>
-          </a:lnRef>
-          <a:fillRef idx="3">
-            <a:schemeClr val="accent1"/>
-          </a:fillRef>
-          <a:effectRef idx="2">
-            <a:schemeClr val="accent1"/>
-          </a:effectRef>
-          <a:fontRef idx="minor">
-            <a:schemeClr val="lt1"/>
-          </a:fontRef>
-        </p:style>
-        <p:txBody>
-          <a:bodyPr rtlCol="0" anchor="ctr"/>
-          <a:lstStyle/>
-          <a:p>
-            <a:pPr algn="ctr"/>
-          </a:p>
-        </p:txBody>
-      </p:sp>
-      <p:sp>
-        <p:nvSpPr>
-          <p:cNvPr id="33" name="TextBox 32"/>
-          <p:cNvSpPr txBox="1"/>
-          <p:nvPr/>
-        </p:nvSpPr>
-        <p:spPr>
-          <a:xfrm>
-            <a:off x="9144000" y="2057400"/>
-            <a:ext cx="2743200" cy="457200"/>
-          </a:xfrm>
-          <a:prstGeom prst="rect">
-            <a:avLst/>
-          </a:prstGeom>
-          <a:noFill/>
-        </p:spPr>
-        <p:txBody>
-          <a:bodyPr wrap="square">
-            <a:spAutoFit/>
-          </a:bodyPr>
-          <a:lstStyle/>
-          <a:p>
-            <a:pPr algn="ctr"/>
-            <a:r>
-              <a:rPr sz="1800" b="1">
-                <a:solidFill>
-                  <a:srgbClr val="FFFFFF"/>
-                </a:solidFill>
-                <a:latin typeface="맑은 고딕"/>
-              </a:rPr>
-              <a:t>기획·데이터</a:t>
-            </a:r>
-          </a:p>
-        </p:txBody>
-      </p:sp>
-      <p:sp>
-        <p:nvSpPr>
-          <p:cNvPr id="34" name="TextBox 33"/>
-          <p:cNvSpPr txBox="1"/>
-          <p:nvPr/>
-        </p:nvSpPr>
-        <p:spPr>
-          <a:xfrm>
-            <a:off x="9144000" y="2606040"/>
-            <a:ext cx="2743200" cy="320040"/>
-          </a:xfrm>
-          <a:prstGeom prst="rect">
-            <a:avLst/>
-          </a:prstGeom>
-          <a:noFill/>
-        </p:spPr>
-        <p:txBody>
-          <a:bodyPr wrap="square">
-            <a:spAutoFit/>
-          </a:bodyPr>
-          <a:lstStyle/>
-          <a:p>
-            <a:pPr algn="ctr"/>
-            <a:r>
-              <a:rPr sz="1200" b="0">
-                <a:solidFill>
-                  <a:srgbClr val="10B981"/>
-                </a:solidFill>
-                <a:latin typeface="맑은 고딕"/>
-              </a:rPr>
-              <a:t>비전공자</a:t>
-            </a:r>
-          </a:p>
-        </p:txBody>
-      </p:sp>
-      <p:sp>
-        <p:nvSpPr>
-          <p:cNvPr id="35" name="TextBox 34"/>
-          <p:cNvSpPr txBox="1"/>
-          <p:nvPr/>
-        </p:nvSpPr>
-        <p:spPr>
-          <a:xfrm>
-            <a:off x="9281160" y="3017520"/>
-            <a:ext cx="2468880" cy="457200"/>
-          </a:xfrm>
-          <a:prstGeom prst="rect">
-            <a:avLst/>
-          </a:prstGeom>
-          <a:noFill/>
-        </p:spPr>
-        <p:txBody>
-          <a:bodyPr wrap="square">
-            <a:spAutoFit/>
-          </a:bodyPr>
-          <a:lstStyle/>
-          <a:p>
-            <a:pPr algn="l"/>
-            <a:r>
-              <a:rPr sz="1400" b="0">
-                <a:solidFill>
-                  <a:srgbClr val="0F172A"/>
-                </a:solidFill>
-                <a:latin typeface="맑은 고딕"/>
-              </a:rPr>
-              <a:t>• 사용자 요구사항 도출</a:t>
-            </a:r>
-          </a:p>
-        </p:txBody>
-      </p:sp>
-      <p:sp>
-        <p:nvSpPr>
-          <p:cNvPr id="36" name="TextBox 35"/>
-          <p:cNvSpPr txBox="1"/>
-          <p:nvPr/>
-        </p:nvSpPr>
-        <p:spPr>
-          <a:xfrm>
-            <a:off x="9281160" y="3520439"/>
-            <a:ext cx="2468880" cy="457200"/>
-          </a:xfrm>
-          <a:prstGeom prst="rect">
-            <a:avLst/>
-          </a:prstGeom>
-          <a:noFill/>
-        </p:spPr>
-        <p:txBody>
-          <a:bodyPr wrap="square">
-            <a:spAutoFit/>
-          </a:bodyPr>
-          <a:lstStyle/>
-          <a:p>
-            <a:pPr algn="l"/>
-            <a:r>
-              <a:rPr sz="1400" b="0">
-                <a:solidFill>
-                  <a:srgbClr val="0F172A"/>
-                </a:solidFill>
-                <a:latin typeface="맑은 고딕"/>
-              </a:rPr>
-              <a:t>• 데이터 정리 (교육과정)</a:t>
-            </a:r>
-          </a:p>
-        </p:txBody>
-      </p:sp>
-      <p:sp>
-        <p:nvSpPr>
-          <p:cNvPr id="37" name="TextBox 36"/>
-          <p:cNvSpPr txBox="1"/>
-          <p:nvPr/>
-        </p:nvSpPr>
-        <p:spPr>
-          <a:xfrm>
-            <a:off x="9281160" y="4023360"/>
-            <a:ext cx="2468880" cy="457200"/>
-          </a:xfrm>
-          <a:prstGeom prst="rect">
-            <a:avLst/>
-          </a:prstGeom>
-          <a:noFill/>
-        </p:spPr>
-        <p:txBody>
-          <a:bodyPr wrap="square">
-            <a:spAutoFit/>
-          </a:bodyPr>
-          <a:lstStyle/>
-          <a:p>
-            <a:pPr algn="l"/>
-            <a:r>
-              <a:rPr sz="1400" b="0">
-                <a:solidFill>
-                  <a:srgbClr val="0F172A"/>
-                </a:solidFill>
-                <a:latin typeface="맑은 고딕"/>
-              </a:rPr>
-              <a:t>• 시연 기획</a:t>
-            </a:r>
-          </a:p>
-        </p:txBody>
-      </p:sp>
-      <p:sp>
-        <p:nvSpPr>
-          <p:cNvPr id="38" name="TextBox 37"/>
-          <p:cNvSpPr txBox="1"/>
-          <p:nvPr/>
-        </p:nvSpPr>
-        <p:spPr>
-          <a:xfrm>
-            <a:off x="9281160" y="4526280"/>
-            <a:ext cx="2468880" cy="457200"/>
-          </a:xfrm>
-          <a:prstGeom prst="rect">
-            <a:avLst/>
-          </a:prstGeom>
-          <a:noFill/>
-        </p:spPr>
-        <p:txBody>
-          <a:bodyPr wrap="square">
-            <a:spAutoFit/>
-          </a:bodyPr>
-          <a:lstStyle/>
-          <a:p>
-            <a:pPr algn="l"/>
-            <a:r>
-              <a:rPr sz="1400" b="0">
-                <a:solidFill>
-                  <a:srgbClr val="0F172A"/>
-                </a:solidFill>
-                <a:latin typeface="맑은 고딕"/>
-              </a:rPr>
-              <a:t>• 발표 보조</a:t>
+              <a:t>•  취업 자료 정리 부담 완화</a:t>
             </a:r>
           </a:p>
         </p:txBody>
@@ -4744,6 +3762,1399 @@
         <p:spPr>
           <a:xfrm>
             <a:off x="0" y="0"/>
+            <a:ext cx="12188952" cy="1280160"/>
+          </a:xfrm>
+          <a:prstGeom prst="rect">
+            <a:avLst/>
+          </a:prstGeom>
+          <a:solidFill>
+            <a:srgbClr val="003876"/>
+          </a:solidFill>
+          <a:ln>
+            <a:noFill/>
+          </a:ln>
+        </p:spPr>
+        <p:style>
+          <a:lnRef idx="1">
+            <a:schemeClr val="accent1"/>
+          </a:lnRef>
+          <a:fillRef idx="3">
+            <a:schemeClr val="accent1"/>
+          </a:fillRef>
+          <a:effectRef idx="2">
+            <a:schemeClr val="accent1"/>
+          </a:effectRef>
+          <a:fontRef idx="minor">
+            <a:schemeClr val="lt1"/>
+          </a:fontRef>
+        </p:style>
+        <p:txBody>
+          <a:bodyPr rtlCol="0" anchor="ctr"/>
+          <a:lstStyle/>
+          <a:p>
+            <a:pPr algn="ctr"/>
+          </a:p>
+        </p:txBody>
+      </p:sp>
+      <p:sp>
+        <p:nvSpPr>
+          <p:cNvPr id="3" name="TextBox 2"/>
+          <p:cNvSpPr txBox="1"/>
+          <p:nvPr/>
+        </p:nvSpPr>
+        <p:spPr>
+          <a:xfrm>
+            <a:off x="548640" y="320040"/>
+            <a:ext cx="10058400" cy="640080"/>
+          </a:xfrm>
+          <a:prstGeom prst="rect">
+            <a:avLst/>
+          </a:prstGeom>
+          <a:noFill/>
+        </p:spPr>
+        <p:txBody>
+          <a:bodyPr wrap="square">
+            <a:spAutoFit/>
+          </a:bodyPr>
+          <a:lstStyle/>
+          <a:p>
+            <a:pPr algn="l"/>
+            <a:r>
+              <a:rPr sz="3600" b="1">
+                <a:solidFill>
+                  <a:srgbClr val="FFFFFF"/>
+                </a:solidFill>
+                <a:latin typeface="맑은 고딕"/>
+              </a:rPr>
+              <a:t>팀 구성</a:t>
+            </a:r>
+          </a:p>
+        </p:txBody>
+      </p:sp>
+      <p:sp>
+        <p:nvSpPr>
+          <p:cNvPr id="4" name="TextBox 3"/>
+          <p:cNvSpPr txBox="1"/>
+          <p:nvPr/>
+        </p:nvSpPr>
+        <p:spPr>
+          <a:xfrm>
+            <a:off x="548640" y="868680"/>
+            <a:ext cx="10058400" cy="365760"/>
+          </a:xfrm>
+          <a:prstGeom prst="rect">
+            <a:avLst/>
+          </a:prstGeom>
+          <a:noFill/>
+        </p:spPr>
+        <p:txBody>
+          <a:bodyPr wrap="square">
+            <a:spAutoFit/>
+          </a:bodyPr>
+          <a:lstStyle/>
+          <a:p>
+            <a:pPr algn="l"/>
+            <a:r>
+              <a:rPr sz="1600" b="0">
+                <a:solidFill>
+                  <a:srgbClr val="10B981"/>
+                </a:solidFill>
+                <a:latin typeface="맑은 고딕"/>
+              </a:rPr>
+              <a:t>TEAM</a:t>
+            </a:r>
+          </a:p>
+        </p:txBody>
+      </p:sp>
+      <p:sp>
+        <p:nvSpPr>
+          <p:cNvPr id="5" name="Rectangle 4"/>
+          <p:cNvSpPr/>
+          <p:nvPr/>
+        </p:nvSpPr>
+        <p:spPr>
+          <a:xfrm>
+            <a:off x="0" y="1280160"/>
+            <a:ext cx="12188952" cy="5577840"/>
+          </a:xfrm>
+          <a:prstGeom prst="rect">
+            <a:avLst/>
+          </a:prstGeom>
+          <a:solidFill>
+            <a:srgbClr val="F1F5F9"/>
+          </a:solidFill>
+          <a:ln>
+            <a:noFill/>
+          </a:ln>
+        </p:spPr>
+        <p:style>
+          <a:lnRef idx="1">
+            <a:schemeClr val="accent1"/>
+          </a:lnRef>
+          <a:fillRef idx="3">
+            <a:schemeClr val="accent1"/>
+          </a:fillRef>
+          <a:effectRef idx="2">
+            <a:schemeClr val="accent1"/>
+          </a:effectRef>
+          <a:fontRef idx="minor">
+            <a:schemeClr val="lt1"/>
+          </a:fontRef>
+        </p:style>
+        <p:txBody>
+          <a:bodyPr rtlCol="0" anchor="ctr"/>
+          <a:lstStyle/>
+          <a:p>
+            <a:pPr algn="ctr"/>
+          </a:p>
+        </p:txBody>
+      </p:sp>
+      <p:sp>
+        <p:nvSpPr>
+          <p:cNvPr id="6" name="TextBox 5"/>
+          <p:cNvSpPr txBox="1"/>
+          <p:nvPr/>
+        </p:nvSpPr>
+        <p:spPr>
+          <a:xfrm>
+            <a:off x="457200" y="1463040"/>
+            <a:ext cx="10972800" cy="457200"/>
+          </a:xfrm>
+          <a:prstGeom prst="rect">
+            <a:avLst/>
+          </a:prstGeom>
+          <a:noFill/>
+        </p:spPr>
+        <p:txBody>
+          <a:bodyPr wrap="square">
+            <a:spAutoFit/>
+          </a:bodyPr>
+          <a:lstStyle/>
+          <a:p>
+            <a:pPr algn="ctr"/>
+            <a:r>
+              <a:rPr sz="1800" b="0">
+                <a:solidFill>
+                  <a:srgbClr val="475569"/>
+                </a:solidFill>
+                <a:latin typeface="맑은 고딕"/>
+              </a:rPr>
+              <a:t>SW전공자 + 비전공자 각 1명 이상 포함  |  팀원: [추가 필요]</a:t>
+            </a:r>
+          </a:p>
+        </p:txBody>
+      </p:sp>
+      <p:sp>
+        <p:nvSpPr>
+          <p:cNvPr id="7" name="Rectangle 6"/>
+          <p:cNvSpPr/>
+          <p:nvPr/>
+        </p:nvSpPr>
+        <p:spPr>
+          <a:xfrm>
+            <a:off x="365760" y="2011680"/>
+            <a:ext cx="2743200" cy="4389120"/>
+          </a:xfrm>
+          <a:prstGeom prst="rect">
+            <a:avLst/>
+          </a:prstGeom>
+          <a:solidFill>
+            <a:srgbClr val="FFFFFF"/>
+          </a:solidFill>
+          <a:ln>
+            <a:noFill/>
+          </a:ln>
+        </p:spPr>
+        <p:style>
+          <a:lnRef idx="1">
+            <a:schemeClr val="accent1"/>
+          </a:lnRef>
+          <a:fillRef idx="3">
+            <a:schemeClr val="accent1"/>
+          </a:fillRef>
+          <a:effectRef idx="2">
+            <a:schemeClr val="accent1"/>
+          </a:effectRef>
+          <a:fontRef idx="minor">
+            <a:schemeClr val="lt1"/>
+          </a:fontRef>
+        </p:style>
+        <p:txBody>
+          <a:bodyPr rtlCol="0" anchor="ctr"/>
+          <a:lstStyle/>
+          <a:p>
+            <a:pPr algn="ctr"/>
+          </a:p>
+        </p:txBody>
+      </p:sp>
+      <p:sp>
+        <p:nvSpPr>
+          <p:cNvPr id="8" name="Rectangle 7"/>
+          <p:cNvSpPr/>
+          <p:nvPr/>
+        </p:nvSpPr>
+        <p:spPr>
+          <a:xfrm>
+            <a:off x="365760" y="2011680"/>
+            <a:ext cx="2743200" cy="548640"/>
+          </a:xfrm>
+          <a:prstGeom prst="rect">
+            <a:avLst/>
+          </a:prstGeom>
+          <a:solidFill>
+            <a:srgbClr val="003876"/>
+          </a:solidFill>
+          <a:ln>
+            <a:noFill/>
+          </a:ln>
+        </p:spPr>
+        <p:style>
+          <a:lnRef idx="1">
+            <a:schemeClr val="accent1"/>
+          </a:lnRef>
+          <a:fillRef idx="3">
+            <a:schemeClr val="accent1"/>
+          </a:fillRef>
+          <a:effectRef idx="2">
+            <a:schemeClr val="accent1"/>
+          </a:effectRef>
+          <a:fontRef idx="minor">
+            <a:schemeClr val="lt1"/>
+          </a:fontRef>
+        </p:style>
+        <p:txBody>
+          <a:bodyPr rtlCol="0" anchor="ctr"/>
+          <a:lstStyle/>
+          <a:p>
+            <a:pPr algn="ctr"/>
+          </a:p>
+        </p:txBody>
+      </p:sp>
+      <p:sp>
+        <p:nvSpPr>
+          <p:cNvPr id="9" name="TextBox 8"/>
+          <p:cNvSpPr txBox="1"/>
+          <p:nvPr/>
+        </p:nvSpPr>
+        <p:spPr>
+          <a:xfrm>
+            <a:off x="365760" y="2057400"/>
+            <a:ext cx="2743200" cy="457200"/>
+          </a:xfrm>
+          <a:prstGeom prst="rect">
+            <a:avLst/>
+          </a:prstGeom>
+          <a:noFill/>
+        </p:spPr>
+        <p:txBody>
+          <a:bodyPr wrap="square">
+            <a:spAutoFit/>
+          </a:bodyPr>
+          <a:lstStyle/>
+          <a:p>
+            <a:pPr algn="ctr"/>
+            <a:r>
+              <a:rPr sz="1800" b="1">
+                <a:solidFill>
+                  <a:srgbClr val="FFFFFF"/>
+                </a:solidFill>
+                <a:latin typeface="맑은 고딕"/>
+              </a:rPr>
+              <a:t>PM / 기획</a:t>
+            </a:r>
+          </a:p>
+        </p:txBody>
+      </p:sp>
+      <p:sp>
+        <p:nvSpPr>
+          <p:cNvPr id="10" name="TextBox 9"/>
+          <p:cNvSpPr txBox="1"/>
+          <p:nvPr/>
+        </p:nvSpPr>
+        <p:spPr>
+          <a:xfrm>
+            <a:off x="365760" y="2606040"/>
+            <a:ext cx="2743200" cy="320040"/>
+          </a:xfrm>
+          <a:prstGeom prst="rect">
+            <a:avLst/>
+          </a:prstGeom>
+          <a:noFill/>
+        </p:spPr>
+        <p:txBody>
+          <a:bodyPr wrap="square">
+            <a:spAutoFit/>
+          </a:bodyPr>
+          <a:lstStyle/>
+          <a:p>
+            <a:pPr algn="ctr"/>
+            <a:r>
+              <a:rPr sz="1200" b="0">
+                <a:solidFill>
+                  <a:srgbClr val="10B981"/>
+                </a:solidFill>
+                <a:latin typeface="맑은 고딕"/>
+              </a:rPr>
+              <a:t>SW전공자</a:t>
+            </a:r>
+          </a:p>
+        </p:txBody>
+      </p:sp>
+      <p:sp>
+        <p:nvSpPr>
+          <p:cNvPr id="11" name="TextBox 10"/>
+          <p:cNvSpPr txBox="1"/>
+          <p:nvPr/>
+        </p:nvSpPr>
+        <p:spPr>
+          <a:xfrm>
+            <a:off x="502920" y="3017520"/>
+            <a:ext cx="2468880" cy="457200"/>
+          </a:xfrm>
+          <a:prstGeom prst="rect">
+            <a:avLst/>
+          </a:prstGeom>
+          <a:noFill/>
+        </p:spPr>
+        <p:txBody>
+          <a:bodyPr wrap="square">
+            <a:spAutoFit/>
+          </a:bodyPr>
+          <a:lstStyle/>
+          <a:p>
+            <a:pPr algn="l"/>
+            <a:r>
+              <a:rPr sz="1400" b="0">
+                <a:solidFill>
+                  <a:srgbClr val="0F172A"/>
+                </a:solidFill>
+                <a:latin typeface="맑은 고딕"/>
+              </a:rPr>
+              <a:t>• 프로젝트 관리</a:t>
+            </a:r>
+          </a:p>
+        </p:txBody>
+      </p:sp>
+      <p:sp>
+        <p:nvSpPr>
+          <p:cNvPr id="12" name="TextBox 11"/>
+          <p:cNvSpPr txBox="1"/>
+          <p:nvPr/>
+        </p:nvSpPr>
+        <p:spPr>
+          <a:xfrm>
+            <a:off x="502920" y="3520439"/>
+            <a:ext cx="2468880" cy="457200"/>
+          </a:xfrm>
+          <a:prstGeom prst="rect">
+            <a:avLst/>
+          </a:prstGeom>
+          <a:noFill/>
+        </p:spPr>
+        <p:txBody>
+          <a:bodyPr wrap="square">
+            <a:spAutoFit/>
+          </a:bodyPr>
+          <a:lstStyle/>
+          <a:p>
+            <a:pPr algn="l"/>
+            <a:r>
+              <a:rPr sz="1400" b="0">
+                <a:solidFill>
+                  <a:srgbClr val="0F172A"/>
+                </a:solidFill>
+                <a:latin typeface="맑은 고딕"/>
+              </a:rPr>
+              <a:t>• 문서·발표자료 작성</a:t>
+            </a:r>
+          </a:p>
+        </p:txBody>
+      </p:sp>
+      <p:sp>
+        <p:nvSpPr>
+          <p:cNvPr id="13" name="TextBox 12"/>
+          <p:cNvSpPr txBox="1"/>
+          <p:nvPr/>
+        </p:nvSpPr>
+        <p:spPr>
+          <a:xfrm>
+            <a:off x="502920" y="4023360"/>
+            <a:ext cx="2468880" cy="457200"/>
+          </a:xfrm>
+          <a:prstGeom prst="rect">
+            <a:avLst/>
+          </a:prstGeom>
+          <a:noFill/>
+        </p:spPr>
+        <p:txBody>
+          <a:bodyPr wrap="square">
+            <a:spAutoFit/>
+          </a:bodyPr>
+          <a:lstStyle/>
+          <a:p>
+            <a:pPr algn="l"/>
+            <a:r>
+              <a:rPr sz="1400" b="0">
+                <a:solidFill>
+                  <a:srgbClr val="0F172A"/>
+                </a:solidFill>
+                <a:latin typeface="맑은 고딕"/>
+              </a:rPr>
+              <a:t>• AI 도구 총괄 활용</a:t>
+            </a:r>
+          </a:p>
+        </p:txBody>
+      </p:sp>
+      <p:sp>
+        <p:nvSpPr>
+          <p:cNvPr id="14" name="TextBox 13"/>
+          <p:cNvSpPr txBox="1"/>
+          <p:nvPr/>
+        </p:nvSpPr>
+        <p:spPr>
+          <a:xfrm>
+            <a:off x="502920" y="4526280"/>
+            <a:ext cx="2468880" cy="457200"/>
+          </a:xfrm>
+          <a:prstGeom prst="rect">
+            <a:avLst/>
+          </a:prstGeom>
+          <a:noFill/>
+        </p:spPr>
+        <p:txBody>
+          <a:bodyPr wrap="square">
+            <a:spAutoFit/>
+          </a:bodyPr>
+          <a:lstStyle/>
+          <a:p>
+            <a:pPr algn="l"/>
+            <a:r>
+              <a:rPr sz="1400" b="0">
+                <a:solidFill>
+                  <a:srgbClr val="0F172A"/>
+                </a:solidFill>
+                <a:latin typeface="맑은 고딕"/>
+              </a:rPr>
+              <a:t>• GitHub 관리</a:t>
+            </a:r>
+          </a:p>
+        </p:txBody>
+      </p:sp>
+      <p:sp>
+        <p:nvSpPr>
+          <p:cNvPr id="15" name="Rectangle 14"/>
+          <p:cNvSpPr/>
+          <p:nvPr/>
+        </p:nvSpPr>
+        <p:spPr>
+          <a:xfrm>
+            <a:off x="3291840" y="2011680"/>
+            <a:ext cx="2743200" cy="4389120"/>
+          </a:xfrm>
+          <a:prstGeom prst="rect">
+            <a:avLst/>
+          </a:prstGeom>
+          <a:solidFill>
+            <a:srgbClr val="FFFFFF"/>
+          </a:solidFill>
+          <a:ln>
+            <a:noFill/>
+          </a:ln>
+        </p:spPr>
+        <p:style>
+          <a:lnRef idx="1">
+            <a:schemeClr val="accent1"/>
+          </a:lnRef>
+          <a:fillRef idx="3">
+            <a:schemeClr val="accent1"/>
+          </a:fillRef>
+          <a:effectRef idx="2">
+            <a:schemeClr val="accent1"/>
+          </a:effectRef>
+          <a:fontRef idx="minor">
+            <a:schemeClr val="lt1"/>
+          </a:fontRef>
+        </p:style>
+        <p:txBody>
+          <a:bodyPr rtlCol="0" anchor="ctr"/>
+          <a:lstStyle/>
+          <a:p>
+            <a:pPr algn="ctr"/>
+          </a:p>
+        </p:txBody>
+      </p:sp>
+      <p:sp>
+        <p:nvSpPr>
+          <p:cNvPr id="16" name="Rectangle 15"/>
+          <p:cNvSpPr/>
+          <p:nvPr/>
+        </p:nvSpPr>
+        <p:spPr>
+          <a:xfrm>
+            <a:off x="3291840" y="2011680"/>
+            <a:ext cx="2743200" cy="548640"/>
+          </a:xfrm>
+          <a:prstGeom prst="rect">
+            <a:avLst/>
+          </a:prstGeom>
+          <a:solidFill>
+            <a:srgbClr val="003876"/>
+          </a:solidFill>
+          <a:ln>
+            <a:noFill/>
+          </a:ln>
+        </p:spPr>
+        <p:style>
+          <a:lnRef idx="1">
+            <a:schemeClr val="accent1"/>
+          </a:lnRef>
+          <a:fillRef idx="3">
+            <a:schemeClr val="accent1"/>
+          </a:fillRef>
+          <a:effectRef idx="2">
+            <a:schemeClr val="accent1"/>
+          </a:effectRef>
+          <a:fontRef idx="minor">
+            <a:schemeClr val="lt1"/>
+          </a:fontRef>
+        </p:style>
+        <p:txBody>
+          <a:bodyPr rtlCol="0" anchor="ctr"/>
+          <a:lstStyle/>
+          <a:p>
+            <a:pPr algn="ctr"/>
+          </a:p>
+        </p:txBody>
+      </p:sp>
+      <p:sp>
+        <p:nvSpPr>
+          <p:cNvPr id="17" name="TextBox 16"/>
+          <p:cNvSpPr txBox="1"/>
+          <p:nvPr/>
+        </p:nvSpPr>
+        <p:spPr>
+          <a:xfrm>
+            <a:off x="3291840" y="2057400"/>
+            <a:ext cx="2743200" cy="457200"/>
+          </a:xfrm>
+          <a:prstGeom prst="rect">
+            <a:avLst/>
+          </a:prstGeom>
+          <a:noFill/>
+        </p:spPr>
+        <p:txBody>
+          <a:bodyPr wrap="square">
+            <a:spAutoFit/>
+          </a:bodyPr>
+          <a:lstStyle/>
+          <a:p>
+            <a:pPr algn="ctr"/>
+            <a:r>
+              <a:rPr sz="1800" b="1">
+                <a:solidFill>
+                  <a:srgbClr val="FFFFFF"/>
+                </a:solidFill>
+                <a:latin typeface="맑은 고딕"/>
+              </a:rPr>
+              <a:t>Backend</a:t>
+            </a:r>
+          </a:p>
+        </p:txBody>
+      </p:sp>
+      <p:sp>
+        <p:nvSpPr>
+          <p:cNvPr id="18" name="TextBox 17"/>
+          <p:cNvSpPr txBox="1"/>
+          <p:nvPr/>
+        </p:nvSpPr>
+        <p:spPr>
+          <a:xfrm>
+            <a:off x="3291840" y="2606040"/>
+            <a:ext cx="2743200" cy="320040"/>
+          </a:xfrm>
+          <a:prstGeom prst="rect">
+            <a:avLst/>
+          </a:prstGeom>
+          <a:noFill/>
+        </p:spPr>
+        <p:txBody>
+          <a:bodyPr wrap="square">
+            <a:spAutoFit/>
+          </a:bodyPr>
+          <a:lstStyle/>
+          <a:p>
+            <a:pPr algn="ctr"/>
+            <a:r>
+              <a:rPr sz="1200" b="0">
+                <a:solidFill>
+                  <a:srgbClr val="10B981"/>
+                </a:solidFill>
+                <a:latin typeface="맑은 고딕"/>
+              </a:rPr>
+              <a:t>SW전공자</a:t>
+            </a:r>
+          </a:p>
+        </p:txBody>
+      </p:sp>
+      <p:sp>
+        <p:nvSpPr>
+          <p:cNvPr id="19" name="TextBox 18"/>
+          <p:cNvSpPr txBox="1"/>
+          <p:nvPr/>
+        </p:nvSpPr>
+        <p:spPr>
+          <a:xfrm>
+            <a:off x="3429000" y="3017520"/>
+            <a:ext cx="2468880" cy="457200"/>
+          </a:xfrm>
+          <a:prstGeom prst="rect">
+            <a:avLst/>
+          </a:prstGeom>
+          <a:noFill/>
+        </p:spPr>
+        <p:txBody>
+          <a:bodyPr wrap="square">
+            <a:spAutoFit/>
+          </a:bodyPr>
+          <a:lstStyle/>
+          <a:p>
+            <a:pPr algn="l"/>
+            <a:r>
+              <a:rPr sz="1400" b="0">
+                <a:solidFill>
+                  <a:srgbClr val="0F172A"/>
+                </a:solidFill>
+                <a:latin typeface="맑은 고딕"/>
+              </a:rPr>
+              <a:t>• FastAPI 서버 개발</a:t>
+            </a:r>
+          </a:p>
+        </p:txBody>
+      </p:sp>
+      <p:sp>
+        <p:nvSpPr>
+          <p:cNvPr id="20" name="TextBox 19"/>
+          <p:cNvSpPr txBox="1"/>
+          <p:nvPr/>
+        </p:nvSpPr>
+        <p:spPr>
+          <a:xfrm>
+            <a:off x="3429000" y="3520439"/>
+            <a:ext cx="2468880" cy="457200"/>
+          </a:xfrm>
+          <a:prstGeom prst="rect">
+            <a:avLst/>
+          </a:prstGeom>
+          <a:noFill/>
+        </p:spPr>
+        <p:txBody>
+          <a:bodyPr wrap="square">
+            <a:spAutoFit/>
+          </a:bodyPr>
+          <a:lstStyle/>
+          <a:p>
+            <a:pPr algn="l"/>
+            <a:r>
+              <a:rPr sz="1400" b="0">
+                <a:solidFill>
+                  <a:srgbClr val="0F172A"/>
+                </a:solidFill>
+                <a:latin typeface="맑은 고딕"/>
+              </a:rPr>
+              <a:t>• DB 설계 및 구현</a:t>
+            </a:r>
+          </a:p>
+        </p:txBody>
+      </p:sp>
+      <p:sp>
+        <p:nvSpPr>
+          <p:cNvPr id="21" name="TextBox 20"/>
+          <p:cNvSpPr txBox="1"/>
+          <p:nvPr/>
+        </p:nvSpPr>
+        <p:spPr>
+          <a:xfrm>
+            <a:off x="3429000" y="4023360"/>
+            <a:ext cx="2468880" cy="457200"/>
+          </a:xfrm>
+          <a:prstGeom prst="rect">
+            <a:avLst/>
+          </a:prstGeom>
+          <a:noFill/>
+        </p:spPr>
+        <p:txBody>
+          <a:bodyPr wrap="square">
+            <a:spAutoFit/>
+          </a:bodyPr>
+          <a:lstStyle/>
+          <a:p>
+            <a:pPr algn="l"/>
+            <a:r>
+              <a:rPr sz="1400" b="0">
+                <a:solidFill>
+                  <a:srgbClr val="0F172A"/>
+                </a:solidFill>
+                <a:latin typeface="맑은 고딕"/>
+              </a:rPr>
+              <a:t>• 추천 로직 구현</a:t>
+            </a:r>
+          </a:p>
+        </p:txBody>
+      </p:sp>
+      <p:sp>
+        <p:nvSpPr>
+          <p:cNvPr id="22" name="TextBox 21"/>
+          <p:cNvSpPr txBox="1"/>
+          <p:nvPr/>
+        </p:nvSpPr>
+        <p:spPr>
+          <a:xfrm>
+            <a:off x="3429000" y="4526280"/>
+            <a:ext cx="2468880" cy="457200"/>
+          </a:xfrm>
+          <a:prstGeom prst="rect">
+            <a:avLst/>
+          </a:prstGeom>
+          <a:noFill/>
+        </p:spPr>
+        <p:txBody>
+          <a:bodyPr wrap="square">
+            <a:spAutoFit/>
+          </a:bodyPr>
+          <a:lstStyle/>
+          <a:p>
+            <a:pPr algn="l"/>
+            <a:r>
+              <a:rPr sz="1400" b="0">
+                <a:solidFill>
+                  <a:srgbClr val="0F172A"/>
+                </a:solidFill>
+                <a:latin typeface="맑은 고딕"/>
+              </a:rPr>
+              <a:t>• OpenAI API 연동</a:t>
+            </a:r>
+          </a:p>
+        </p:txBody>
+      </p:sp>
+      <p:sp>
+        <p:nvSpPr>
+          <p:cNvPr id="23" name="Rectangle 22"/>
+          <p:cNvSpPr/>
+          <p:nvPr/>
+        </p:nvSpPr>
+        <p:spPr>
+          <a:xfrm>
+            <a:off x="6217920" y="2011680"/>
+            <a:ext cx="2743200" cy="4389120"/>
+          </a:xfrm>
+          <a:prstGeom prst="rect">
+            <a:avLst/>
+          </a:prstGeom>
+          <a:solidFill>
+            <a:srgbClr val="FFFFFF"/>
+          </a:solidFill>
+          <a:ln>
+            <a:noFill/>
+          </a:ln>
+        </p:spPr>
+        <p:style>
+          <a:lnRef idx="1">
+            <a:schemeClr val="accent1"/>
+          </a:lnRef>
+          <a:fillRef idx="3">
+            <a:schemeClr val="accent1"/>
+          </a:fillRef>
+          <a:effectRef idx="2">
+            <a:schemeClr val="accent1"/>
+          </a:effectRef>
+          <a:fontRef idx="minor">
+            <a:schemeClr val="lt1"/>
+          </a:fontRef>
+        </p:style>
+        <p:txBody>
+          <a:bodyPr rtlCol="0" anchor="ctr"/>
+          <a:lstStyle/>
+          <a:p>
+            <a:pPr algn="ctr"/>
+          </a:p>
+        </p:txBody>
+      </p:sp>
+      <p:sp>
+        <p:nvSpPr>
+          <p:cNvPr id="24" name="Rectangle 23"/>
+          <p:cNvSpPr/>
+          <p:nvPr/>
+        </p:nvSpPr>
+        <p:spPr>
+          <a:xfrm>
+            <a:off x="6217920" y="2011680"/>
+            <a:ext cx="2743200" cy="548640"/>
+          </a:xfrm>
+          <a:prstGeom prst="rect">
+            <a:avLst/>
+          </a:prstGeom>
+          <a:solidFill>
+            <a:srgbClr val="003876"/>
+          </a:solidFill>
+          <a:ln>
+            <a:noFill/>
+          </a:ln>
+        </p:spPr>
+        <p:style>
+          <a:lnRef idx="1">
+            <a:schemeClr val="accent1"/>
+          </a:lnRef>
+          <a:fillRef idx="3">
+            <a:schemeClr val="accent1"/>
+          </a:fillRef>
+          <a:effectRef idx="2">
+            <a:schemeClr val="accent1"/>
+          </a:effectRef>
+          <a:fontRef idx="minor">
+            <a:schemeClr val="lt1"/>
+          </a:fontRef>
+        </p:style>
+        <p:txBody>
+          <a:bodyPr rtlCol="0" anchor="ctr"/>
+          <a:lstStyle/>
+          <a:p>
+            <a:pPr algn="ctr"/>
+          </a:p>
+        </p:txBody>
+      </p:sp>
+      <p:sp>
+        <p:nvSpPr>
+          <p:cNvPr id="25" name="TextBox 24"/>
+          <p:cNvSpPr txBox="1"/>
+          <p:nvPr/>
+        </p:nvSpPr>
+        <p:spPr>
+          <a:xfrm>
+            <a:off x="6217920" y="2057400"/>
+            <a:ext cx="2743200" cy="457200"/>
+          </a:xfrm>
+          <a:prstGeom prst="rect">
+            <a:avLst/>
+          </a:prstGeom>
+          <a:noFill/>
+        </p:spPr>
+        <p:txBody>
+          <a:bodyPr wrap="square">
+            <a:spAutoFit/>
+          </a:bodyPr>
+          <a:lstStyle/>
+          <a:p>
+            <a:pPr algn="ctr"/>
+            <a:r>
+              <a:rPr sz="1800" b="1">
+                <a:solidFill>
+                  <a:srgbClr val="FFFFFF"/>
+                </a:solidFill>
+                <a:latin typeface="맑은 고딕"/>
+              </a:rPr>
+              <a:t>Frontend</a:t>
+            </a:r>
+          </a:p>
+        </p:txBody>
+      </p:sp>
+      <p:sp>
+        <p:nvSpPr>
+          <p:cNvPr id="26" name="TextBox 25"/>
+          <p:cNvSpPr txBox="1"/>
+          <p:nvPr/>
+        </p:nvSpPr>
+        <p:spPr>
+          <a:xfrm>
+            <a:off x="6217920" y="2606040"/>
+            <a:ext cx="2743200" cy="320040"/>
+          </a:xfrm>
+          <a:prstGeom prst="rect">
+            <a:avLst/>
+          </a:prstGeom>
+          <a:noFill/>
+        </p:spPr>
+        <p:txBody>
+          <a:bodyPr wrap="square">
+            <a:spAutoFit/>
+          </a:bodyPr>
+          <a:lstStyle/>
+          <a:p>
+            <a:pPr algn="ctr"/>
+            <a:r>
+              <a:rPr sz="1200" b="0">
+                <a:solidFill>
+                  <a:srgbClr val="10B981"/>
+                </a:solidFill>
+                <a:latin typeface="맑은 고딕"/>
+              </a:rPr>
+              <a:t>SW전공자 또는 비전공자</a:t>
+            </a:r>
+          </a:p>
+        </p:txBody>
+      </p:sp>
+      <p:sp>
+        <p:nvSpPr>
+          <p:cNvPr id="27" name="TextBox 26"/>
+          <p:cNvSpPr txBox="1"/>
+          <p:nvPr/>
+        </p:nvSpPr>
+        <p:spPr>
+          <a:xfrm>
+            <a:off x="6355080" y="3017520"/>
+            <a:ext cx="2468880" cy="457200"/>
+          </a:xfrm>
+          <a:prstGeom prst="rect">
+            <a:avLst/>
+          </a:prstGeom>
+          <a:noFill/>
+        </p:spPr>
+        <p:txBody>
+          <a:bodyPr wrap="square">
+            <a:spAutoFit/>
+          </a:bodyPr>
+          <a:lstStyle/>
+          <a:p>
+            <a:pPr algn="l"/>
+            <a:r>
+              <a:rPr sz="1400" b="0">
+                <a:solidFill>
+                  <a:srgbClr val="0F172A"/>
+                </a:solidFill>
+                <a:latin typeface="맑은 고딕"/>
+              </a:rPr>
+              <a:t>• React UI 개발</a:t>
+            </a:r>
+          </a:p>
+        </p:txBody>
+      </p:sp>
+      <p:sp>
+        <p:nvSpPr>
+          <p:cNvPr id="28" name="TextBox 27"/>
+          <p:cNvSpPr txBox="1"/>
+          <p:nvPr/>
+        </p:nvSpPr>
+        <p:spPr>
+          <a:xfrm>
+            <a:off x="6355080" y="3520439"/>
+            <a:ext cx="2468880" cy="457200"/>
+          </a:xfrm>
+          <a:prstGeom prst="rect">
+            <a:avLst/>
+          </a:prstGeom>
+          <a:noFill/>
+        </p:spPr>
+        <p:txBody>
+          <a:bodyPr wrap="square">
+            <a:spAutoFit/>
+          </a:bodyPr>
+          <a:lstStyle/>
+          <a:p>
+            <a:pPr algn="l"/>
+            <a:r>
+              <a:rPr sz="1400" b="0">
+                <a:solidFill>
+                  <a:srgbClr val="0F172A"/>
+                </a:solidFill>
+                <a:latin typeface="맑은 고딕"/>
+              </a:rPr>
+              <a:t>• 화면 설계·구현</a:t>
+            </a:r>
+          </a:p>
+        </p:txBody>
+      </p:sp>
+      <p:sp>
+        <p:nvSpPr>
+          <p:cNvPr id="29" name="TextBox 28"/>
+          <p:cNvSpPr txBox="1"/>
+          <p:nvPr/>
+        </p:nvSpPr>
+        <p:spPr>
+          <a:xfrm>
+            <a:off x="6355080" y="4023360"/>
+            <a:ext cx="2468880" cy="457200"/>
+          </a:xfrm>
+          <a:prstGeom prst="rect">
+            <a:avLst/>
+          </a:prstGeom>
+          <a:noFill/>
+        </p:spPr>
+        <p:txBody>
+          <a:bodyPr wrap="square">
+            <a:spAutoFit/>
+          </a:bodyPr>
+          <a:lstStyle/>
+          <a:p>
+            <a:pPr algn="l"/>
+            <a:r>
+              <a:rPr sz="1400" b="0">
+                <a:solidFill>
+                  <a:srgbClr val="0F172A"/>
+                </a:solidFill>
+                <a:latin typeface="맑은 고딕"/>
+              </a:rPr>
+              <a:t>• API 연동</a:t>
+            </a:r>
+          </a:p>
+        </p:txBody>
+      </p:sp>
+      <p:sp>
+        <p:nvSpPr>
+          <p:cNvPr id="30" name="TextBox 29"/>
+          <p:cNvSpPr txBox="1"/>
+          <p:nvPr/>
+        </p:nvSpPr>
+        <p:spPr>
+          <a:xfrm>
+            <a:off x="6355080" y="4526280"/>
+            <a:ext cx="2468880" cy="457200"/>
+          </a:xfrm>
+          <a:prstGeom prst="rect">
+            <a:avLst/>
+          </a:prstGeom>
+          <a:noFill/>
+        </p:spPr>
+        <p:txBody>
+          <a:bodyPr wrap="square">
+            <a:spAutoFit/>
+          </a:bodyPr>
+          <a:lstStyle/>
+          <a:p>
+            <a:pPr algn="l"/>
+            <a:r>
+              <a:rPr sz="1400" b="0">
+                <a:solidFill>
+                  <a:srgbClr val="0F172A"/>
+                </a:solidFill>
+                <a:latin typeface="맑은 고딕"/>
+              </a:rPr>
+              <a:t>• UX 개선</a:t>
+            </a:r>
+          </a:p>
+        </p:txBody>
+      </p:sp>
+      <p:sp>
+        <p:nvSpPr>
+          <p:cNvPr id="31" name="Rectangle 30"/>
+          <p:cNvSpPr/>
+          <p:nvPr/>
+        </p:nvSpPr>
+        <p:spPr>
+          <a:xfrm>
+            <a:off x="9144000" y="2011680"/>
+            <a:ext cx="2743200" cy="4389120"/>
+          </a:xfrm>
+          <a:prstGeom prst="rect">
+            <a:avLst/>
+          </a:prstGeom>
+          <a:solidFill>
+            <a:srgbClr val="FFFFFF"/>
+          </a:solidFill>
+          <a:ln>
+            <a:noFill/>
+          </a:ln>
+        </p:spPr>
+        <p:style>
+          <a:lnRef idx="1">
+            <a:schemeClr val="accent1"/>
+          </a:lnRef>
+          <a:fillRef idx="3">
+            <a:schemeClr val="accent1"/>
+          </a:fillRef>
+          <a:effectRef idx="2">
+            <a:schemeClr val="accent1"/>
+          </a:effectRef>
+          <a:fontRef idx="minor">
+            <a:schemeClr val="lt1"/>
+          </a:fontRef>
+        </p:style>
+        <p:txBody>
+          <a:bodyPr rtlCol="0" anchor="ctr"/>
+          <a:lstStyle/>
+          <a:p>
+            <a:pPr algn="ctr"/>
+          </a:p>
+        </p:txBody>
+      </p:sp>
+      <p:sp>
+        <p:nvSpPr>
+          <p:cNvPr id="32" name="Rectangle 31"/>
+          <p:cNvSpPr/>
+          <p:nvPr/>
+        </p:nvSpPr>
+        <p:spPr>
+          <a:xfrm>
+            <a:off x="9144000" y="2011680"/>
+            <a:ext cx="2743200" cy="548640"/>
+          </a:xfrm>
+          <a:prstGeom prst="rect">
+            <a:avLst/>
+          </a:prstGeom>
+          <a:solidFill>
+            <a:srgbClr val="003876"/>
+          </a:solidFill>
+          <a:ln>
+            <a:noFill/>
+          </a:ln>
+        </p:spPr>
+        <p:style>
+          <a:lnRef idx="1">
+            <a:schemeClr val="accent1"/>
+          </a:lnRef>
+          <a:fillRef idx="3">
+            <a:schemeClr val="accent1"/>
+          </a:fillRef>
+          <a:effectRef idx="2">
+            <a:schemeClr val="accent1"/>
+          </a:effectRef>
+          <a:fontRef idx="minor">
+            <a:schemeClr val="lt1"/>
+          </a:fontRef>
+        </p:style>
+        <p:txBody>
+          <a:bodyPr rtlCol="0" anchor="ctr"/>
+          <a:lstStyle/>
+          <a:p>
+            <a:pPr algn="ctr"/>
+          </a:p>
+        </p:txBody>
+      </p:sp>
+      <p:sp>
+        <p:nvSpPr>
+          <p:cNvPr id="33" name="TextBox 32"/>
+          <p:cNvSpPr txBox="1"/>
+          <p:nvPr/>
+        </p:nvSpPr>
+        <p:spPr>
+          <a:xfrm>
+            <a:off x="9144000" y="2057400"/>
+            <a:ext cx="2743200" cy="457200"/>
+          </a:xfrm>
+          <a:prstGeom prst="rect">
+            <a:avLst/>
+          </a:prstGeom>
+          <a:noFill/>
+        </p:spPr>
+        <p:txBody>
+          <a:bodyPr wrap="square">
+            <a:spAutoFit/>
+          </a:bodyPr>
+          <a:lstStyle/>
+          <a:p>
+            <a:pPr algn="ctr"/>
+            <a:r>
+              <a:rPr sz="1800" b="1">
+                <a:solidFill>
+                  <a:srgbClr val="FFFFFF"/>
+                </a:solidFill>
+                <a:latin typeface="맑은 고딕"/>
+              </a:rPr>
+              <a:t>기획·데이터</a:t>
+            </a:r>
+          </a:p>
+        </p:txBody>
+      </p:sp>
+      <p:sp>
+        <p:nvSpPr>
+          <p:cNvPr id="34" name="TextBox 33"/>
+          <p:cNvSpPr txBox="1"/>
+          <p:nvPr/>
+        </p:nvSpPr>
+        <p:spPr>
+          <a:xfrm>
+            <a:off x="9144000" y="2606040"/>
+            <a:ext cx="2743200" cy="320040"/>
+          </a:xfrm>
+          <a:prstGeom prst="rect">
+            <a:avLst/>
+          </a:prstGeom>
+          <a:noFill/>
+        </p:spPr>
+        <p:txBody>
+          <a:bodyPr wrap="square">
+            <a:spAutoFit/>
+          </a:bodyPr>
+          <a:lstStyle/>
+          <a:p>
+            <a:pPr algn="ctr"/>
+            <a:r>
+              <a:rPr sz="1200" b="0">
+                <a:solidFill>
+                  <a:srgbClr val="10B981"/>
+                </a:solidFill>
+                <a:latin typeface="맑은 고딕"/>
+              </a:rPr>
+              <a:t>비전공자</a:t>
+            </a:r>
+          </a:p>
+        </p:txBody>
+      </p:sp>
+      <p:sp>
+        <p:nvSpPr>
+          <p:cNvPr id="35" name="TextBox 34"/>
+          <p:cNvSpPr txBox="1"/>
+          <p:nvPr/>
+        </p:nvSpPr>
+        <p:spPr>
+          <a:xfrm>
+            <a:off x="9281160" y="3017520"/>
+            <a:ext cx="2468880" cy="457200"/>
+          </a:xfrm>
+          <a:prstGeom prst="rect">
+            <a:avLst/>
+          </a:prstGeom>
+          <a:noFill/>
+        </p:spPr>
+        <p:txBody>
+          <a:bodyPr wrap="square">
+            <a:spAutoFit/>
+          </a:bodyPr>
+          <a:lstStyle/>
+          <a:p>
+            <a:pPr algn="l"/>
+            <a:r>
+              <a:rPr sz="1400" b="0">
+                <a:solidFill>
+                  <a:srgbClr val="0F172A"/>
+                </a:solidFill>
+                <a:latin typeface="맑은 고딕"/>
+              </a:rPr>
+              <a:t>• 사용자 요구사항 도출</a:t>
+            </a:r>
+          </a:p>
+        </p:txBody>
+      </p:sp>
+      <p:sp>
+        <p:nvSpPr>
+          <p:cNvPr id="36" name="TextBox 35"/>
+          <p:cNvSpPr txBox="1"/>
+          <p:nvPr/>
+        </p:nvSpPr>
+        <p:spPr>
+          <a:xfrm>
+            <a:off x="9281160" y="3520439"/>
+            <a:ext cx="2468880" cy="457200"/>
+          </a:xfrm>
+          <a:prstGeom prst="rect">
+            <a:avLst/>
+          </a:prstGeom>
+          <a:noFill/>
+        </p:spPr>
+        <p:txBody>
+          <a:bodyPr wrap="square">
+            <a:spAutoFit/>
+          </a:bodyPr>
+          <a:lstStyle/>
+          <a:p>
+            <a:pPr algn="l"/>
+            <a:r>
+              <a:rPr sz="1400" b="0">
+                <a:solidFill>
+                  <a:srgbClr val="0F172A"/>
+                </a:solidFill>
+                <a:latin typeface="맑은 고딕"/>
+              </a:rPr>
+              <a:t>• 데이터 정리 (교육과정)</a:t>
+            </a:r>
+          </a:p>
+        </p:txBody>
+      </p:sp>
+      <p:sp>
+        <p:nvSpPr>
+          <p:cNvPr id="37" name="TextBox 36"/>
+          <p:cNvSpPr txBox="1"/>
+          <p:nvPr/>
+        </p:nvSpPr>
+        <p:spPr>
+          <a:xfrm>
+            <a:off x="9281160" y="4023360"/>
+            <a:ext cx="2468880" cy="457200"/>
+          </a:xfrm>
+          <a:prstGeom prst="rect">
+            <a:avLst/>
+          </a:prstGeom>
+          <a:noFill/>
+        </p:spPr>
+        <p:txBody>
+          <a:bodyPr wrap="square">
+            <a:spAutoFit/>
+          </a:bodyPr>
+          <a:lstStyle/>
+          <a:p>
+            <a:pPr algn="l"/>
+            <a:r>
+              <a:rPr sz="1400" b="0">
+                <a:solidFill>
+                  <a:srgbClr val="0F172A"/>
+                </a:solidFill>
+                <a:latin typeface="맑은 고딕"/>
+              </a:rPr>
+              <a:t>• 시연 기획</a:t>
+            </a:r>
+          </a:p>
+        </p:txBody>
+      </p:sp>
+      <p:sp>
+        <p:nvSpPr>
+          <p:cNvPr id="38" name="TextBox 37"/>
+          <p:cNvSpPr txBox="1"/>
+          <p:nvPr/>
+        </p:nvSpPr>
+        <p:spPr>
+          <a:xfrm>
+            <a:off x="9281160" y="4526280"/>
+            <a:ext cx="2468880" cy="457200"/>
+          </a:xfrm>
+          <a:prstGeom prst="rect">
+            <a:avLst/>
+          </a:prstGeom>
+          <a:noFill/>
+        </p:spPr>
+        <p:txBody>
+          <a:bodyPr wrap="square">
+            <a:spAutoFit/>
+          </a:bodyPr>
+          <a:lstStyle/>
+          <a:p>
+            <a:pPr algn="l"/>
+            <a:r>
+              <a:rPr sz="1400" b="0">
+                <a:solidFill>
+                  <a:srgbClr val="0F172A"/>
+                </a:solidFill>
+                <a:latin typeface="맑은 고딕"/>
+              </a:rPr>
+              <a:t>• 발표 보조</a:t>
+            </a:r>
+          </a:p>
+        </p:txBody>
+      </p:sp>
+    </p:spTree>
+  </p:cSld>
+  <p:clrMapOvr>
+    <a:masterClrMapping/>
+  </p:clrMapOvr>
+</p:sld>
+</file>
+
+<file path=ppt/slides/slide12.xml><?xml version="1.0" encoding="utf-8"?>
+<p:sld xmlns:a="http://schemas.openxmlformats.org/drawingml/2006/main" xmlns:p="http://schemas.openxmlformats.org/presentationml/2006/main" xmlns:r="http://schemas.openxmlformats.org/officeDocument/2006/relationships">
+  <p:cSld>
+    <p:spTree>
+      <p:nvGrpSpPr>
+        <p:cNvPr id="1" name=""/>
+        <p:cNvGrpSpPr/>
+        <p:nvPr/>
+      </p:nvGrpSpPr>
+      <p:grpSpPr/>
+      <p:sp>
+        <p:nvSpPr>
+          <p:cNvPr id="2" name="Rectangle 1"/>
+          <p:cNvSpPr/>
+          <p:nvPr/>
+        </p:nvSpPr>
+        <p:spPr>
+          <a:xfrm>
+            <a:off x="0" y="0"/>
             <a:ext cx="12188952" cy="6858000"/>
           </a:xfrm>
           <a:prstGeom prst="rect">
@@ -8543,7 +8954,7 @@
         </p:nvSpPr>
         <p:spPr>
           <a:xfrm>
-            <a:off x="548640" y="320040"/>
+            <a:off x="548640" y="274320"/>
             <a:ext cx="10058400" cy="640080"/>
           </a:xfrm>
           <a:prstGeom prst="rect">
@@ -8559,13 +8970,13 @@
           <a:p>
             <a:pPr algn="l"/>
             <a:r>
-              <a:rPr sz="3600" b="1">
+              <a:rPr sz="3200" b="1">
                 <a:solidFill>
                   <a:srgbClr val="FFFFFF"/>
                 </a:solidFill>
                 <a:latin typeface="맑은 고딕"/>
               </a:rPr>
-              <a:t>시스템 아키텍처</a:t>
+              <a:t>AI Agent 협업 개발 방식</a:t>
             </a:r>
           </a:p>
         </p:txBody>
@@ -8600,7 +9011,7 @@
                 </a:solidFill>
                 <a:latin typeface="맑은 고딕"/>
               </a:rPr>
-              <a:t>SYSTEM ARCHITECTURE</a:t>
+              <a:t>Claude Multi-Agent  ×  MCP (Model Context Protocol)</a:t>
             </a:r>
           </a:p>
         </p:txBody>
@@ -8656,8 +9067,200 @@
         </p:nvSpPr>
         <p:spPr>
           <a:xfrm>
-            <a:off x="365760" y="457200"/>
-            <a:ext cx="11430000" cy="54864"/>
+            <a:off x="4114800" y="1463040"/>
+            <a:ext cx="3931920" cy="1005840"/>
+          </a:xfrm>
+          <a:prstGeom prst="rect">
+            <a:avLst/>
+          </a:prstGeom>
+          <a:solidFill>
+            <a:srgbClr val="003876"/>
+          </a:solidFill>
+          <a:ln>
+            <a:noFill/>
+          </a:ln>
+        </p:spPr>
+        <p:style>
+          <a:lnRef idx="1">
+            <a:schemeClr val="accent1"/>
+          </a:lnRef>
+          <a:fillRef idx="3">
+            <a:schemeClr val="accent1"/>
+          </a:fillRef>
+          <a:effectRef idx="2">
+            <a:schemeClr val="accent1"/>
+          </a:effectRef>
+          <a:fontRef idx="minor">
+            <a:schemeClr val="lt1"/>
+          </a:fontRef>
+        </p:style>
+        <p:txBody>
+          <a:bodyPr rtlCol="0" anchor="ctr"/>
+          <a:lstStyle/>
+          <a:p>
+            <a:pPr algn="ctr"/>
+          </a:p>
+        </p:txBody>
+      </p:sp>
+      <p:sp>
+        <p:nvSpPr>
+          <p:cNvPr id="7" name="TextBox 6"/>
+          <p:cNvSpPr txBox="1"/>
+          <p:nvPr/>
+        </p:nvSpPr>
+        <p:spPr>
+          <a:xfrm>
+            <a:off x="4114800" y="1508760"/>
+            <a:ext cx="3931920" cy="411480"/>
+          </a:xfrm>
+          <a:prstGeom prst="rect">
+            <a:avLst/>
+          </a:prstGeom>
+          <a:noFill/>
+        </p:spPr>
+        <p:txBody>
+          <a:bodyPr wrap="square">
+            <a:spAutoFit/>
+          </a:bodyPr>
+          <a:lstStyle/>
+          <a:p>
+            <a:pPr algn="ctr"/>
+            <a:r>
+              <a:rPr sz="1800" b="1">
+                <a:solidFill>
+                  <a:srgbClr val="FFFFFF"/>
+                </a:solidFill>
+                <a:latin typeface="맑은 고딕"/>
+              </a:rPr>
+              <a:t>PM Agent</a:t>
+            </a:r>
+          </a:p>
+        </p:txBody>
+      </p:sp>
+      <p:sp>
+        <p:nvSpPr>
+          <p:cNvPr id="8" name="TextBox 7"/>
+          <p:cNvSpPr txBox="1"/>
+          <p:nvPr/>
+        </p:nvSpPr>
+        <p:spPr>
+          <a:xfrm>
+            <a:off x="4114800" y="1920240"/>
+            <a:ext cx="3931920" cy="457200"/>
+          </a:xfrm>
+          <a:prstGeom prst="rect">
+            <a:avLst/>
+          </a:prstGeom>
+          <a:noFill/>
+        </p:spPr>
+        <p:txBody>
+          <a:bodyPr wrap="square">
+            <a:spAutoFit/>
+          </a:bodyPr>
+          <a:lstStyle/>
+          <a:p>
+            <a:pPr algn="ctr"/>
+            <a:r>
+              <a:rPr sz="1200" b="0">
+                <a:solidFill>
+                  <a:srgbClr val="10B981"/>
+                </a:solidFill>
+                <a:latin typeface="맑은 고딕"/>
+              </a:rPr>
+              <a:t>기획 · 문서 · 코드리뷰
+MCP: filesystem  github</a:t>
+            </a:r>
+          </a:p>
+        </p:txBody>
+      </p:sp>
+      <p:sp>
+        <p:nvSpPr>
+          <p:cNvPr id="9" name="TextBox 8"/>
+          <p:cNvSpPr txBox="1"/>
+          <p:nvPr/>
+        </p:nvSpPr>
+        <p:spPr>
+          <a:xfrm>
+            <a:off x="2286000" y="2606040"/>
+            <a:ext cx="7772400" cy="365760"/>
+          </a:xfrm>
+          <a:prstGeom prst="rect">
+            <a:avLst/>
+          </a:prstGeom>
+          <a:noFill/>
+        </p:spPr>
+        <p:txBody>
+          <a:bodyPr wrap="square">
+            <a:spAutoFit/>
+          </a:bodyPr>
+          <a:lstStyle/>
+          <a:p>
+            <a:pPr algn="ctr"/>
+            <a:r>
+              <a:rPr sz="1600" b="0">
+                <a:solidFill>
+                  <a:srgbClr val="475569"/>
+                </a:solidFill>
+                <a:latin typeface="맑은 고딕"/>
+              </a:rPr>
+              <a:t>태스크 분배  ↙                    ↘</a:t>
+            </a:r>
+          </a:p>
+        </p:txBody>
+      </p:sp>
+      <p:sp>
+        <p:nvSpPr>
+          <p:cNvPr id="10" name="Rectangle 9"/>
+          <p:cNvSpPr/>
+          <p:nvPr/>
+        </p:nvSpPr>
+        <p:spPr>
+          <a:xfrm>
+            <a:off x="365760" y="3108960"/>
+            <a:ext cx="5120640" cy="2560320"/>
+          </a:xfrm>
+          <a:prstGeom prst="rect">
+            <a:avLst/>
+          </a:prstGeom>
+          <a:solidFill>
+            <a:srgbClr val="1E293B"/>
+          </a:solidFill>
+          <a:ln>
+            <a:noFill/>
+          </a:ln>
+        </p:spPr>
+        <p:style>
+          <a:lnRef idx="1">
+            <a:schemeClr val="accent1"/>
+          </a:lnRef>
+          <a:fillRef idx="3">
+            <a:schemeClr val="accent1"/>
+          </a:fillRef>
+          <a:effectRef idx="2">
+            <a:schemeClr val="accent1"/>
+          </a:effectRef>
+          <a:fontRef idx="minor">
+            <a:schemeClr val="lt1"/>
+          </a:fontRef>
+        </p:style>
+        <p:txBody>
+          <a:bodyPr rtlCol="0" anchor="ctr"/>
+          <a:lstStyle/>
+          <a:p>
+            <a:pPr algn="ctr"/>
+          </a:p>
+        </p:txBody>
+      </p:sp>
+      <p:sp>
+        <p:nvSpPr>
+          <p:cNvPr id="11" name="Rectangle 10"/>
+          <p:cNvSpPr/>
+          <p:nvPr/>
+        </p:nvSpPr>
+        <p:spPr>
+          <a:xfrm>
+            <a:off x="365760" y="3108960"/>
+            <a:ext cx="5120640" cy="457200"/>
           </a:xfrm>
           <a:prstGeom prst="rect">
             <a:avLst/>
@@ -8693,14 +9296,49 @@
       </p:sp>
       <p:sp>
         <p:nvSpPr>
-          <p:cNvPr id="7" name="TextBox 6"/>
-          <p:cNvSpPr txBox="1"/>
-          <p:nvPr/>
-        </p:nvSpPr>
-        <p:spPr>
-          <a:xfrm>
-            <a:off x="457200" y="548640"/>
-            <a:ext cx="3657600" cy="365760"/>
+          <p:cNvPr id="12" name="TextBox 11"/>
+          <p:cNvSpPr txBox="1"/>
+          <p:nvPr/>
+        </p:nvSpPr>
+        <p:spPr>
+          <a:xfrm>
+            <a:off x="457200" y="3136392"/>
+            <a:ext cx="4937760" cy="384048"/>
+          </a:xfrm>
+          <a:prstGeom prst="rect">
+            <a:avLst/>
+          </a:prstGeom>
+          <a:noFill/>
+        </p:spPr>
+        <p:txBody>
+          <a:bodyPr wrap="square">
+            <a:spAutoFit/>
+          </a:bodyPr>
+          <a:lstStyle/>
+          <a:p>
+            <a:pPr algn="ctr"/>
+            <a:r>
+              <a:rPr sz="1500" b="1">
+                <a:solidFill>
+                  <a:srgbClr val="0F172A"/>
+                </a:solidFill>
+                <a:latin typeface="맑은 고딕"/>
+              </a:rPr>
+              <a:t>Backend Agent  (Claude Sonnet 4.6)</a:t>
+            </a:r>
+          </a:p>
+        </p:txBody>
+      </p:sp>
+      <p:sp>
+        <p:nvSpPr>
+          <p:cNvPr id="13" name="TextBox 12"/>
+          <p:cNvSpPr txBox="1"/>
+          <p:nvPr/>
+        </p:nvSpPr>
+        <p:spPr>
+          <a:xfrm>
+            <a:off x="548640" y="3639312"/>
+            <a:ext cx="4754880" cy="411480"/>
           </a:xfrm>
           <a:prstGeom prst="rect">
             <a:avLst/>
@@ -8715,27 +9353,27 @@
           <a:p>
             <a:pPr algn="l"/>
             <a:r>
-              <a:rPr sz="1800" b="1">
-                <a:solidFill>
-                  <a:srgbClr val="10B981"/>
-                </a:solidFill>
-                <a:latin typeface="맑은 고딕"/>
-              </a:rPr>
-              <a:t>Frontend</a:t>
-            </a:r>
-          </a:p>
-        </p:txBody>
-      </p:sp>
-      <p:sp>
-        <p:nvSpPr>
-          <p:cNvPr id="8" name="TextBox 7"/>
-          <p:cNvSpPr txBox="1"/>
-          <p:nvPr/>
-        </p:nvSpPr>
-        <p:spPr>
-          <a:xfrm>
-            <a:off x="4114800" y="548640"/>
-            <a:ext cx="7315200" cy="365760"/>
+              <a:rPr sz="1300" b="0">
+                <a:solidFill>
+                  <a:srgbClr val="FFFFFF"/>
+                </a:solidFill>
+                <a:latin typeface="맑은 고딕"/>
+              </a:rPr>
+              <a:t>FastAPI · DB · OpenAI 연동</a:t>
+            </a:r>
+          </a:p>
+        </p:txBody>
+      </p:sp>
+      <p:sp>
+        <p:nvSpPr>
+          <p:cNvPr id="14" name="TextBox 13"/>
+          <p:cNvSpPr txBox="1"/>
+          <p:nvPr/>
+        </p:nvSpPr>
+        <p:spPr>
+          <a:xfrm>
+            <a:off x="548640" y="4096512"/>
+            <a:ext cx="4754880" cy="411480"/>
           </a:xfrm>
           <a:prstGeom prst="rect">
             <a:avLst/>
@@ -8750,27 +9388,140 @@
           <a:p>
             <a:pPr algn="l"/>
             <a:r>
-              <a:rPr sz="1800" b="0">
-                <a:solidFill>
-                  <a:srgbClr val="F1F5F9"/>
-                </a:solidFill>
-                <a:latin typeface="맑은 고딕"/>
-              </a:rPr>
-              <a:t>React 19 + Vite + TypeScript</a:t>
-            </a:r>
-          </a:p>
-        </p:txBody>
-      </p:sp>
-      <p:sp>
-        <p:nvSpPr>
-          <p:cNvPr id="9" name="Rectangle 8"/>
+              <a:rPr sz="1300" b="0">
+                <a:solidFill>
+                  <a:srgbClr val="FFFFFF"/>
+                </a:solidFill>
+                <a:latin typeface="맑은 고딕"/>
+              </a:rPr>
+              <a:t>MCP: filesystem  /  postgres  /  github</a:t>
+            </a:r>
+          </a:p>
+        </p:txBody>
+      </p:sp>
+      <p:sp>
+        <p:nvSpPr>
+          <p:cNvPr id="15" name="TextBox 14"/>
+          <p:cNvSpPr txBox="1"/>
+          <p:nvPr/>
+        </p:nvSpPr>
+        <p:spPr>
+          <a:xfrm>
+            <a:off x="548640" y="4553712"/>
+            <a:ext cx="4754880" cy="411480"/>
+          </a:xfrm>
+          <a:prstGeom prst="rect">
+            <a:avLst/>
+          </a:prstGeom>
+          <a:noFill/>
+        </p:spPr>
+        <p:txBody>
+          <a:bodyPr wrap="square">
+            <a:spAutoFit/>
+          </a:bodyPr>
+          <a:lstStyle/>
+          <a:p>
+            <a:pPr algn="l"/>
+            <a:r>
+              <a:rPr sz="1300" b="0">
+                <a:solidFill>
+                  <a:srgbClr val="475569"/>
+                </a:solidFill>
+                <a:latin typeface="맑은 고딕"/>
+              </a:rPr>
+              <a:t>  └ postgres: DB 스키마 직접 조회·검증</a:t>
+            </a:r>
+          </a:p>
+        </p:txBody>
+      </p:sp>
+      <p:sp>
+        <p:nvSpPr>
+          <p:cNvPr id="16" name="TextBox 15"/>
+          <p:cNvSpPr txBox="1"/>
+          <p:nvPr/>
+        </p:nvSpPr>
+        <p:spPr>
+          <a:xfrm>
+            <a:off x="548640" y="5010912"/>
+            <a:ext cx="4754880" cy="411480"/>
+          </a:xfrm>
+          <a:prstGeom prst="rect">
+            <a:avLst/>
+          </a:prstGeom>
+          <a:noFill/>
+        </p:spPr>
+        <p:txBody>
+          <a:bodyPr wrap="square">
+            <a:spAutoFit/>
+          </a:bodyPr>
+          <a:lstStyle/>
+          <a:p>
+            <a:pPr algn="l"/>
+            <a:r>
+              <a:rPr sz="1300" b="0">
+                <a:solidFill>
+                  <a:srgbClr val="475569"/>
+                </a:solidFill>
+                <a:latin typeface="맑은 고딕"/>
+              </a:rPr>
+              <a:t>Skills: claude-api  /  simplify</a:t>
+            </a:r>
+          </a:p>
+        </p:txBody>
+      </p:sp>
+      <p:sp>
+        <p:nvSpPr>
+          <p:cNvPr id="17" name="Rectangle 16"/>
           <p:cNvSpPr/>
           <p:nvPr/>
         </p:nvSpPr>
         <p:spPr>
           <a:xfrm>
-            <a:off x="365760" y="2926080"/>
-            <a:ext cx="11430000" cy="54864"/>
+            <a:off x="6675120" y="3108960"/>
+            <a:ext cx="5120640" cy="2560320"/>
+          </a:xfrm>
+          <a:prstGeom prst="rect">
+            <a:avLst/>
+          </a:prstGeom>
+          <a:solidFill>
+            <a:srgbClr val="1E293B"/>
+          </a:solidFill>
+          <a:ln>
+            <a:noFill/>
+          </a:ln>
+        </p:spPr>
+        <p:style>
+          <a:lnRef idx="1">
+            <a:schemeClr val="accent1"/>
+          </a:lnRef>
+          <a:fillRef idx="3">
+            <a:schemeClr val="accent1"/>
+          </a:fillRef>
+          <a:effectRef idx="2">
+            <a:schemeClr val="accent1"/>
+          </a:effectRef>
+          <a:fontRef idx="minor">
+            <a:schemeClr val="lt1"/>
+          </a:fontRef>
+        </p:style>
+        <p:txBody>
+          <a:bodyPr rtlCol="0" anchor="ctr"/>
+          <a:lstStyle/>
+          <a:p>
+            <a:pPr algn="ctr"/>
+          </a:p>
+        </p:txBody>
+      </p:sp>
+      <p:sp>
+        <p:nvSpPr>
+          <p:cNvPr id="18" name="Rectangle 17"/>
+          <p:cNvSpPr/>
+          <p:nvPr/>
+        </p:nvSpPr>
+        <p:spPr>
+          <a:xfrm>
+            <a:off x="6675120" y="3108960"/>
+            <a:ext cx="5120640" cy="457200"/>
           </a:xfrm>
           <a:prstGeom prst="rect">
             <a:avLst/>
@@ -8806,14 +9557,49 @@
       </p:sp>
       <p:sp>
         <p:nvSpPr>
-          <p:cNvPr id="10" name="TextBox 9"/>
-          <p:cNvSpPr txBox="1"/>
-          <p:nvPr/>
-        </p:nvSpPr>
-        <p:spPr>
-          <a:xfrm>
-            <a:off x="457200" y="3017520"/>
-            <a:ext cx="3657600" cy="365760"/>
+          <p:cNvPr id="19" name="TextBox 18"/>
+          <p:cNvSpPr txBox="1"/>
+          <p:nvPr/>
+        </p:nvSpPr>
+        <p:spPr>
+          <a:xfrm>
+            <a:off x="6766560" y="3136392"/>
+            <a:ext cx="4937760" cy="384048"/>
+          </a:xfrm>
+          <a:prstGeom prst="rect">
+            <a:avLst/>
+          </a:prstGeom>
+          <a:noFill/>
+        </p:spPr>
+        <p:txBody>
+          <a:bodyPr wrap="square">
+            <a:spAutoFit/>
+          </a:bodyPr>
+          <a:lstStyle/>
+          <a:p>
+            <a:pPr algn="ctr"/>
+            <a:r>
+              <a:rPr sz="1500" b="1">
+                <a:solidFill>
+                  <a:srgbClr val="0F172A"/>
+                </a:solidFill>
+                <a:latin typeface="맑은 고딕"/>
+              </a:rPr>
+              <a:t>Frontend Agent  (Claude Sonnet 4.6)</a:t>
+            </a:r>
+          </a:p>
+        </p:txBody>
+      </p:sp>
+      <p:sp>
+        <p:nvSpPr>
+          <p:cNvPr id="20" name="TextBox 19"/>
+          <p:cNvSpPr txBox="1"/>
+          <p:nvPr/>
+        </p:nvSpPr>
+        <p:spPr>
+          <a:xfrm>
+            <a:off x="6858000" y="3639312"/>
+            <a:ext cx="4754880" cy="411480"/>
           </a:xfrm>
           <a:prstGeom prst="rect">
             <a:avLst/>
@@ -8828,27 +9614,27 @@
           <a:p>
             <a:pPr algn="l"/>
             <a:r>
-              <a:rPr sz="1800" b="1">
-                <a:solidFill>
-                  <a:srgbClr val="10B981"/>
-                </a:solidFill>
-                <a:latin typeface="맑은 고딕"/>
-              </a:rPr>
-              <a:t>Backend API</a:t>
-            </a:r>
-          </a:p>
-        </p:txBody>
-      </p:sp>
-      <p:sp>
-        <p:nvSpPr>
-          <p:cNvPr id="11" name="TextBox 10"/>
-          <p:cNvSpPr txBox="1"/>
-          <p:nvPr/>
-        </p:nvSpPr>
-        <p:spPr>
-          <a:xfrm>
-            <a:off x="4114800" y="3017520"/>
-            <a:ext cx="7315200" cy="365760"/>
+              <a:rPr sz="1300" b="0">
+                <a:solidFill>
+                  <a:srgbClr val="FFFFFF"/>
+                </a:solidFill>
+                <a:latin typeface="맑은 고딕"/>
+              </a:rPr>
+              <a:t>React UI · 컴포넌트 · API 연동</a:t>
+            </a:r>
+          </a:p>
+        </p:txBody>
+      </p:sp>
+      <p:sp>
+        <p:nvSpPr>
+          <p:cNvPr id="21" name="TextBox 20"/>
+          <p:cNvSpPr txBox="1"/>
+          <p:nvPr/>
+        </p:nvSpPr>
+        <p:spPr>
+          <a:xfrm>
+            <a:off x="6858000" y="4096512"/>
+            <a:ext cx="4754880" cy="411480"/>
           </a:xfrm>
           <a:prstGeom prst="rect">
             <a:avLst/>
@@ -8863,26 +9649,96 @@
           <a:p>
             <a:pPr algn="l"/>
             <a:r>
-              <a:rPr sz="1800" b="0">
-                <a:solidFill>
-                  <a:srgbClr val="F1F5F9"/>
-                </a:solidFill>
-                <a:latin typeface="맑은 고딕"/>
-              </a:rPr>
-              <a:t>FastAPI (Python) + JWT Auth</a:t>
-            </a:r>
-          </a:p>
-        </p:txBody>
-      </p:sp>
-      <p:sp>
-        <p:nvSpPr>
-          <p:cNvPr id="12" name="Rectangle 11"/>
+              <a:rPr sz="1300" b="0">
+                <a:solidFill>
+                  <a:srgbClr val="FFFFFF"/>
+                </a:solidFill>
+                <a:latin typeface="맑은 고딕"/>
+              </a:rPr>
+              <a:t>MCP: filesystem  /  github  /  puppeteer</a:t>
+            </a:r>
+          </a:p>
+        </p:txBody>
+      </p:sp>
+      <p:sp>
+        <p:nvSpPr>
+          <p:cNvPr id="22" name="TextBox 21"/>
+          <p:cNvSpPr txBox="1"/>
+          <p:nvPr/>
+        </p:nvSpPr>
+        <p:spPr>
+          <a:xfrm>
+            <a:off x="6858000" y="4553712"/>
+            <a:ext cx="4754880" cy="411480"/>
+          </a:xfrm>
+          <a:prstGeom prst="rect">
+            <a:avLst/>
+          </a:prstGeom>
+          <a:noFill/>
+        </p:spPr>
+        <p:txBody>
+          <a:bodyPr wrap="square">
+            <a:spAutoFit/>
+          </a:bodyPr>
+          <a:lstStyle/>
+          <a:p>
+            <a:pPr algn="l"/>
+            <a:r>
+              <a:rPr sz="1300" b="0">
+                <a:solidFill>
+                  <a:srgbClr val="475569"/>
+                </a:solidFill>
+                <a:latin typeface="맑은 고딕"/>
+              </a:rPr>
+              <a:t>  └ puppeteer: UI 자동 스크린샷 검증</a:t>
+            </a:r>
+          </a:p>
+        </p:txBody>
+      </p:sp>
+      <p:sp>
+        <p:nvSpPr>
+          <p:cNvPr id="23" name="TextBox 22"/>
+          <p:cNvSpPr txBox="1"/>
+          <p:nvPr/>
+        </p:nvSpPr>
+        <p:spPr>
+          <a:xfrm>
+            <a:off x="6858000" y="5010912"/>
+            <a:ext cx="4754880" cy="411480"/>
+          </a:xfrm>
+          <a:prstGeom prst="rect">
+            <a:avLst/>
+          </a:prstGeom>
+          <a:noFill/>
+        </p:spPr>
+        <p:txBody>
+          <a:bodyPr wrap="square">
+            <a:spAutoFit/>
+          </a:bodyPr>
+          <a:lstStyle/>
+          <a:p>
+            <a:pPr algn="l"/>
+            <a:r>
+              <a:rPr sz="1300" b="0">
+                <a:solidFill>
+                  <a:srgbClr val="475569"/>
+                </a:solidFill>
+                <a:latin typeface="맑은 고딕"/>
+              </a:rPr>
+              <a:t>Skills: simplify</a:t>
+            </a:r>
+          </a:p>
+        </p:txBody>
+      </p:sp>
+      <p:sp>
+        <p:nvSpPr>
+          <p:cNvPr id="24" name="Rectangle 23"/>
           <p:cNvSpPr/>
           <p:nvPr/>
         </p:nvSpPr>
         <p:spPr>
           <a:xfrm>
-            <a:off x="365760" y="5394960"/>
+            <a:off x="365760" y="5852160"/>
             <a:ext cx="11430000" cy="54864"/>
           </a:xfrm>
           <a:prstGeom prst="rect">
@@ -8919,218 +9775,35 @@
       </p:sp>
       <p:sp>
         <p:nvSpPr>
-          <p:cNvPr id="13" name="TextBox 12"/>
-          <p:cNvSpPr txBox="1"/>
-          <p:nvPr/>
-        </p:nvSpPr>
-        <p:spPr>
-          <a:xfrm>
-            <a:off x="457200" y="5486400"/>
-            <a:ext cx="3657600" cy="365760"/>
-          </a:xfrm>
-          <a:prstGeom prst="rect">
-            <a:avLst/>
-          </a:prstGeom>
-          <a:noFill/>
-        </p:spPr>
-        <p:txBody>
-          <a:bodyPr wrap="square">
-            <a:spAutoFit/>
-          </a:bodyPr>
-          <a:lstStyle/>
-          <a:p>
-            <a:pPr algn="l"/>
-            <a:r>
-              <a:rPr sz="1800" b="1">
+          <p:cNvPr id="25" name="TextBox 24"/>
+          <p:cNvSpPr txBox="1"/>
+          <p:nvPr/>
+        </p:nvSpPr>
+        <p:spPr>
+          <a:xfrm>
+            <a:off x="365760" y="5989320"/>
+            <a:ext cx="11430000" cy="457200"/>
+          </a:xfrm>
+          <a:prstGeom prst="rect">
+            <a:avLst/>
+          </a:prstGeom>
+          <a:noFill/>
+        </p:spPr>
+        <p:txBody>
+          <a:bodyPr wrap="square">
+            <a:spAutoFit/>
+          </a:bodyPr>
+          <a:lstStyle/>
+          <a:p>
+            <a:pPr algn="ctr"/>
+            <a:r>
+              <a:rPr sz="1400" b="0">
                 <a:solidFill>
                   <a:srgbClr val="10B981"/>
                 </a:solidFill>
                 <a:latin typeface="맑은 고딕"/>
               </a:rPr>
-              <a:t>Database</a:t>
-            </a:r>
-          </a:p>
-        </p:txBody>
-      </p:sp>
-      <p:sp>
-        <p:nvSpPr>
-          <p:cNvPr id="14" name="TextBox 13"/>
-          <p:cNvSpPr txBox="1"/>
-          <p:nvPr/>
-        </p:nvSpPr>
-        <p:spPr>
-          <a:xfrm>
-            <a:off x="4114800" y="5486400"/>
-            <a:ext cx="7315200" cy="365760"/>
-          </a:xfrm>
-          <a:prstGeom prst="rect">
-            <a:avLst/>
-          </a:prstGeom>
-          <a:noFill/>
-        </p:spPr>
-        <p:txBody>
-          <a:bodyPr wrap="square">
-            <a:spAutoFit/>
-          </a:bodyPr>
-          <a:lstStyle/>
-          <a:p>
-            <a:pPr algn="l"/>
-            <a:r>
-              <a:rPr sz="1800" b="0">
-                <a:solidFill>
-                  <a:srgbClr val="F1F5F9"/>
-                </a:solidFill>
-                <a:latin typeface="맑은 고딕"/>
-              </a:rPr>
-              <a:t>PostgreSQL + SQLAlchemy</a:t>
-            </a:r>
-          </a:p>
-        </p:txBody>
-      </p:sp>
-      <p:sp>
-        <p:nvSpPr>
-          <p:cNvPr id="15" name="Rectangle 14"/>
-          <p:cNvSpPr/>
-          <p:nvPr/>
-        </p:nvSpPr>
-        <p:spPr>
-          <a:xfrm>
-            <a:off x="365760" y="7863840"/>
-            <a:ext cx="11430000" cy="54864"/>
-          </a:xfrm>
-          <a:prstGeom prst="rect">
-            <a:avLst/>
-          </a:prstGeom>
-          <a:solidFill>
-            <a:srgbClr val="10B981"/>
-          </a:solidFill>
-          <a:ln>
-            <a:noFill/>
-          </a:ln>
-        </p:spPr>
-        <p:style>
-          <a:lnRef idx="1">
-            <a:schemeClr val="accent1"/>
-          </a:lnRef>
-          <a:fillRef idx="3">
-            <a:schemeClr val="accent1"/>
-          </a:fillRef>
-          <a:effectRef idx="2">
-            <a:schemeClr val="accent1"/>
-          </a:effectRef>
-          <a:fontRef idx="minor">
-            <a:schemeClr val="lt1"/>
-          </a:fontRef>
-        </p:style>
-        <p:txBody>
-          <a:bodyPr rtlCol="0" anchor="ctr"/>
-          <a:lstStyle/>
-          <a:p>
-            <a:pPr algn="ctr"/>
-          </a:p>
-        </p:txBody>
-      </p:sp>
-      <p:sp>
-        <p:nvSpPr>
-          <p:cNvPr id="16" name="TextBox 15"/>
-          <p:cNvSpPr txBox="1"/>
-          <p:nvPr/>
-        </p:nvSpPr>
-        <p:spPr>
-          <a:xfrm>
-            <a:off x="457200" y="7955280"/>
-            <a:ext cx="3657600" cy="365760"/>
-          </a:xfrm>
-          <a:prstGeom prst="rect">
-            <a:avLst/>
-          </a:prstGeom>
-          <a:noFill/>
-        </p:spPr>
-        <p:txBody>
-          <a:bodyPr wrap="square">
-            <a:spAutoFit/>
-          </a:bodyPr>
-          <a:lstStyle/>
-          <a:p>
-            <a:pPr algn="l"/>
-            <a:r>
-              <a:rPr sz="1800" b="1">
-                <a:solidFill>
-                  <a:srgbClr val="10B981"/>
-                </a:solidFill>
-                <a:latin typeface="맑은 고딕"/>
-              </a:rPr>
-              <a:t>AI Layer</a:t>
-            </a:r>
-          </a:p>
-        </p:txBody>
-      </p:sp>
-      <p:sp>
-        <p:nvSpPr>
-          <p:cNvPr id="17" name="TextBox 16"/>
-          <p:cNvSpPr txBox="1"/>
-          <p:nvPr/>
-        </p:nvSpPr>
-        <p:spPr>
-          <a:xfrm>
-            <a:off x="4114800" y="7955280"/>
-            <a:ext cx="7315200" cy="365760"/>
-          </a:xfrm>
-          <a:prstGeom prst="rect">
-            <a:avLst/>
-          </a:prstGeom>
-          <a:noFill/>
-        </p:spPr>
-        <p:txBody>
-          <a:bodyPr wrap="square">
-            <a:spAutoFit/>
-          </a:bodyPr>
-          <a:lstStyle/>
-          <a:p>
-            <a:pPr algn="l"/>
-            <a:r>
-              <a:rPr sz="1800" b="0">
-                <a:solidFill>
-                  <a:srgbClr val="F1F5F9"/>
-                </a:solidFill>
-                <a:latin typeface="맑은 고딕"/>
-              </a:rPr>
-              <a:t>OpenAI API (GPT-4o)</a:t>
-            </a:r>
-          </a:p>
-        </p:txBody>
-      </p:sp>
-      <p:sp>
-        <p:nvSpPr>
-          <p:cNvPr id="18" name="TextBox 17"/>
-          <p:cNvSpPr txBox="1"/>
-          <p:nvPr/>
-        </p:nvSpPr>
-        <p:spPr>
-          <a:xfrm>
-            <a:off x="457200" y="5760720"/>
-            <a:ext cx="10972800" cy="457200"/>
-          </a:xfrm>
-          <a:prstGeom prst="rect">
-            <a:avLst/>
-          </a:prstGeom>
-          <a:noFill/>
-        </p:spPr>
-        <p:txBody>
-          <a:bodyPr wrap="square">
-            <a:spAutoFit/>
-          </a:bodyPr>
-          <a:lstStyle/>
-          <a:p>
-            <a:pPr algn="ctr"/>
-            <a:r>
-              <a:rPr sz="1800" b="0">
-                <a:solidFill>
-                  <a:srgbClr val="475569"/>
-                </a:solidFill>
-                <a:latin typeface="맑은 고딕"/>
-              </a:rPr>
-              <a:t>배포: Vercel (FE)  +  VPS / Docker (BE)</a:t>
+              <a:t>worktree 격리로 충돌 없는 병렬 작업  ·  모든 작업이 git commit으로 자동 추적  ·  PM Agent가 PR 자동 리뷰</a:t>
             </a:r>
           </a:p>
         </p:txBody>
@@ -9226,7 +9899,7 @@
                 </a:solidFill>
                 <a:latin typeface="맑은 고딕"/>
               </a:rPr>
-              <a:t>MVP 범위 &amp; 개발 일정</a:t>
+              <a:t>시스템 아키텍처</a:t>
             </a:r>
           </a:p>
         </p:txBody>
@@ -9261,7 +9934,7 @@
                 </a:solidFill>
                 <a:latin typeface="맑은 고딕"/>
               </a:rPr>
-              <a:t>ROADMAP</a:t>
+              <a:t>SYSTEM ARCHITECTURE</a:t>
             </a:r>
           </a:p>
         </p:txBody>
@@ -9281,7 +9954,7 @@
             <a:avLst/>
           </a:prstGeom>
           <a:solidFill>
-            <a:srgbClr val="F1F5F9"/>
+            <a:srgbClr val="0F172A"/>
           </a:solidFill>
           <a:ln>
             <a:noFill/>
@@ -9311,55 +9984,20 @@
       </p:sp>
       <p:sp>
         <p:nvSpPr>
-          <p:cNvPr id="6" name="TextBox 5"/>
-          <p:cNvSpPr txBox="1"/>
-          <p:nvPr/>
-        </p:nvSpPr>
-        <p:spPr>
-          <a:xfrm>
-            <a:off x="457200" y="1371600"/>
-            <a:ext cx="5486400" cy="457200"/>
-          </a:xfrm>
-          <a:prstGeom prst="rect">
-            <a:avLst/>
-          </a:prstGeom>
-          <a:noFill/>
-        </p:spPr>
-        <p:txBody>
-          <a:bodyPr wrap="square">
-            <a:spAutoFit/>
-          </a:bodyPr>
-          <a:lstStyle/>
-          <a:p>
-            <a:pPr algn="l"/>
-            <a:r>
-              <a:rPr sz="2000" b="1">
-                <a:solidFill>
-                  <a:srgbClr val="003876"/>
-                </a:solidFill>
-                <a:latin typeface="맑은 고딕"/>
-              </a:rPr>
-              <a:t>우선 구현 기능 (MVP)</a:t>
-            </a:r>
-          </a:p>
-        </p:txBody>
-      </p:sp>
-      <p:sp>
-        <p:nvSpPr>
-          <p:cNvPr id="7" name="Rectangle 6"/>
+          <p:cNvPr id="6" name="Rectangle 5"/>
           <p:cNvSpPr/>
           <p:nvPr/>
         </p:nvSpPr>
         <p:spPr>
           <a:xfrm>
-            <a:off x="457200" y="1828800"/>
-            <a:ext cx="5486400" cy="4114800"/>
+            <a:off x="365760" y="457200"/>
+            <a:ext cx="11430000" cy="54864"/>
           </a:xfrm>
           <a:prstGeom prst="rect">
             <a:avLst/>
           </a:prstGeom>
           <a:solidFill>
-            <a:srgbClr val="FFFFFF"/>
+            <a:srgbClr val="10B981"/>
           </a:solidFill>
           <a:ln>
             <a:noFill/>
@@ -9389,14 +10027,49 @@
       </p:sp>
       <p:sp>
         <p:nvSpPr>
+          <p:cNvPr id="7" name="TextBox 6"/>
+          <p:cNvSpPr txBox="1"/>
+          <p:nvPr/>
+        </p:nvSpPr>
+        <p:spPr>
+          <a:xfrm>
+            <a:off x="457200" y="548640"/>
+            <a:ext cx="3657600" cy="365760"/>
+          </a:xfrm>
+          <a:prstGeom prst="rect">
+            <a:avLst/>
+          </a:prstGeom>
+          <a:noFill/>
+        </p:spPr>
+        <p:txBody>
+          <a:bodyPr wrap="square">
+            <a:spAutoFit/>
+          </a:bodyPr>
+          <a:lstStyle/>
+          <a:p>
+            <a:pPr algn="l"/>
+            <a:r>
+              <a:rPr sz="1800" b="1">
+                <a:solidFill>
+                  <a:srgbClr val="10B981"/>
+                </a:solidFill>
+                <a:latin typeface="맑은 고딕"/>
+              </a:rPr>
+              <a:t>Frontend</a:t>
+            </a:r>
+          </a:p>
+        </p:txBody>
+      </p:sp>
+      <p:sp>
+        <p:nvSpPr>
           <p:cNvPr id="8" name="TextBox 7"/>
           <p:cNvSpPr txBox="1"/>
           <p:nvPr/>
         </p:nvSpPr>
         <p:spPr>
           <a:xfrm>
-            <a:off x="640080" y="2011680"/>
-            <a:ext cx="5120640" cy="3749040"/>
+            <a:off x="4114800" y="548640"/>
+            <a:ext cx="7315200" cy="365760"/>
           </a:xfrm>
           <a:prstGeom prst="rect">
             <a:avLst/>
@@ -9411,128 +10084,33 @@
           <a:p>
             <a:pPr algn="l"/>
             <a:r>
-              <a:rPr sz="1600">
-                <a:solidFill>
-                  <a:srgbClr val="0F172A"/>
-                </a:solidFill>
-                <a:latin typeface="맑은 고딕"/>
-              </a:rPr>
-              <a:t>  ✅ 학생 회원가입 / 로그인 (완성)</a:t>
-            </a:r>
-          </a:p>
-          <a:p>
-            <a:pPr algn="l"/>
-            <a:r>
-              <a:rPr sz="1600">
-                <a:solidFill>
-                  <a:srgbClr val="0F172A"/>
-                </a:solidFill>
-                <a:latin typeface="맑은 고딕"/>
-              </a:rPr>
-              <a:t>  ✅ 학과별 졸업요건 DB + 관리자 CRUD (완성)</a:t>
-            </a:r>
-          </a:p>
-          <a:p>
-            <a:pPr algn="l"/>
-            <a:r>
-              <a:rPr sz="1600">
-                <a:solidFill>
-                  <a:srgbClr val="0F172A"/>
-                </a:solidFill>
-                <a:latin typeface="맑은 고딕"/>
-              </a:rPr>
-              <a:t>  🔄 수강 이력 입력 및 조회</a:t>
-            </a:r>
-          </a:p>
-          <a:p>
-            <a:pPr algn="l"/>
-            <a:r>
-              <a:rPr sz="1600">
-                <a:solidFill>
-                  <a:srgbClr val="0F172A"/>
-                </a:solidFill>
-                <a:latin typeface="맑은 고딕"/>
-              </a:rPr>
-              <a:t>  🔄 졸업요건 충족률 계산 대시보드</a:t>
-            </a:r>
-          </a:p>
-          <a:p>
-            <a:pPr algn="l"/>
-            <a:r>
-              <a:rPr sz="1600">
-                <a:solidFill>
-                  <a:srgbClr val="0F172A"/>
-                </a:solidFill>
-                <a:latin typeface="맑은 고딕"/>
-              </a:rPr>
-              <a:t>  🔄 AI 챗봇 (OpenAI 연동)</a:t>
-            </a:r>
-          </a:p>
-          <a:p>
-            <a:pPr algn="l"/>
-            <a:r>
-              <a:rPr sz="1600">
-                <a:solidFill>
-                  <a:srgbClr val="0F172A"/>
-                </a:solidFill>
-                <a:latin typeface="맑은 고딕"/>
-              </a:rPr>
-              <a:t>  🔄 다음 학기 수강 추천 로직</a:t>
-            </a:r>
-          </a:p>
-        </p:txBody>
-      </p:sp>
-      <p:sp>
-        <p:nvSpPr>
-          <p:cNvPr id="9" name="TextBox 8"/>
-          <p:cNvSpPr txBox="1"/>
-          <p:nvPr/>
-        </p:nvSpPr>
-        <p:spPr>
-          <a:xfrm>
-            <a:off x="6400800" y="1371600"/>
-            <a:ext cx="5486400" cy="457200"/>
-          </a:xfrm>
-          <a:prstGeom prst="rect">
-            <a:avLst/>
-          </a:prstGeom>
-          <a:noFill/>
-        </p:spPr>
-        <p:txBody>
-          <a:bodyPr wrap="square">
-            <a:spAutoFit/>
-          </a:bodyPr>
-          <a:lstStyle/>
-          <a:p>
-            <a:pPr algn="l"/>
-            <a:r>
-              <a:rPr sz="2000" b="1">
-                <a:solidFill>
-                  <a:srgbClr val="003876"/>
-                </a:solidFill>
-                <a:latin typeface="맑은 고딕"/>
-              </a:rPr>
-              <a:t>개발 일정</a:t>
-            </a:r>
-          </a:p>
-        </p:txBody>
-      </p:sp>
-      <p:sp>
-        <p:nvSpPr>
-          <p:cNvPr id="10" name="Rectangle 9"/>
+              <a:rPr sz="1800" b="0">
+                <a:solidFill>
+                  <a:srgbClr val="F1F5F9"/>
+                </a:solidFill>
+                <a:latin typeface="맑은 고딕"/>
+              </a:rPr>
+              <a:t>React 19 + Vite + TypeScript</a:t>
+            </a:r>
+          </a:p>
+        </p:txBody>
+      </p:sp>
+      <p:sp>
+        <p:nvSpPr>
+          <p:cNvPr id="9" name="Rectangle 8"/>
           <p:cNvSpPr/>
           <p:nvPr/>
         </p:nvSpPr>
         <p:spPr>
           <a:xfrm>
-            <a:off x="6400800" y="1828800"/>
-            <a:ext cx="2011680" cy="457200"/>
+            <a:off x="365760" y="2926080"/>
+            <a:ext cx="11430000" cy="54864"/>
           </a:xfrm>
           <a:prstGeom prst="rect">
             <a:avLst/>
           </a:prstGeom>
           <a:solidFill>
-            <a:srgbClr val="003876"/>
+            <a:srgbClr val="10B981"/>
           </a:solidFill>
           <a:ln>
             <a:noFill/>
@@ -9562,49 +10140,49 @@
       </p:sp>
       <p:sp>
         <p:nvSpPr>
+          <p:cNvPr id="10" name="TextBox 9"/>
+          <p:cNvSpPr txBox="1"/>
+          <p:nvPr/>
+        </p:nvSpPr>
+        <p:spPr>
+          <a:xfrm>
+            <a:off x="457200" y="3017520"/>
+            <a:ext cx="3657600" cy="365760"/>
+          </a:xfrm>
+          <a:prstGeom prst="rect">
+            <a:avLst/>
+          </a:prstGeom>
+          <a:noFill/>
+        </p:spPr>
+        <p:txBody>
+          <a:bodyPr wrap="square">
+            <a:spAutoFit/>
+          </a:bodyPr>
+          <a:lstStyle/>
+          <a:p>
+            <a:pPr algn="l"/>
+            <a:r>
+              <a:rPr sz="1800" b="1">
+                <a:solidFill>
+                  <a:srgbClr val="10B981"/>
+                </a:solidFill>
+                <a:latin typeface="맑은 고딕"/>
+              </a:rPr>
+              <a:t>Backend API</a:t>
+            </a:r>
+          </a:p>
+        </p:txBody>
+      </p:sp>
+      <p:sp>
+        <p:nvSpPr>
           <p:cNvPr id="11" name="TextBox 10"/>
           <p:cNvSpPr txBox="1"/>
           <p:nvPr/>
         </p:nvSpPr>
         <p:spPr>
           <a:xfrm>
-            <a:off x="6400800" y="1828800"/>
-            <a:ext cx="2011680" cy="457200"/>
-          </a:xfrm>
-          <a:prstGeom prst="rect">
-            <a:avLst/>
-          </a:prstGeom>
-          <a:noFill/>
-        </p:spPr>
-        <p:txBody>
-          <a:bodyPr wrap="square">
-            <a:spAutoFit/>
-          </a:bodyPr>
-          <a:lstStyle/>
-          <a:p>
-            <a:pPr algn="ctr"/>
-            <a:r>
-              <a:rPr sz="1300" b="0">
-                <a:solidFill>
-                  <a:srgbClr val="FFFFFF"/>
-                </a:solidFill>
-                <a:latin typeface="맑은 고딕"/>
-              </a:rPr>
-              <a:t>5월 4~11일</a:t>
-            </a:r>
-          </a:p>
-        </p:txBody>
-      </p:sp>
-      <p:sp>
-        <p:nvSpPr>
-          <p:cNvPr id="12" name="TextBox 11"/>
-          <p:cNvSpPr txBox="1"/>
-          <p:nvPr/>
-        </p:nvSpPr>
-        <p:spPr>
-          <a:xfrm>
-            <a:off x="8549640" y="1828800"/>
-            <a:ext cx="3474720" cy="457200"/>
+            <a:off x="4114800" y="3017520"/>
+            <a:ext cx="7315200" cy="365760"/>
           </a:xfrm>
           <a:prstGeom prst="rect">
             <a:avLst/>
@@ -9619,33 +10197,33 @@
           <a:p>
             <a:pPr algn="l"/>
             <a:r>
-              <a:rPr sz="1400" b="0">
-                <a:solidFill>
-                  <a:srgbClr val="0F172A"/>
-                </a:solidFill>
-                <a:latin typeface="맑은 고딕"/>
-              </a:rPr>
-              <a:t>예선 서류 제출</a:t>
-            </a:r>
-          </a:p>
-        </p:txBody>
-      </p:sp>
-      <p:sp>
-        <p:nvSpPr>
-          <p:cNvPr id="13" name="Rectangle 12"/>
+              <a:rPr sz="1800" b="0">
+                <a:solidFill>
+                  <a:srgbClr val="F1F5F9"/>
+                </a:solidFill>
+                <a:latin typeface="맑은 고딕"/>
+              </a:rPr>
+              <a:t>FastAPI (Python) + JWT Auth</a:t>
+            </a:r>
+          </a:p>
+        </p:txBody>
+      </p:sp>
+      <p:sp>
+        <p:nvSpPr>
+          <p:cNvPr id="12" name="Rectangle 11"/>
           <p:cNvSpPr/>
           <p:nvPr/>
         </p:nvSpPr>
         <p:spPr>
           <a:xfrm>
-            <a:off x="6400800" y="2423160"/>
-            <a:ext cx="2011680" cy="457200"/>
+            <a:off x="365760" y="5394960"/>
+            <a:ext cx="11430000" cy="54864"/>
           </a:xfrm>
           <a:prstGeom prst="rect">
             <a:avLst/>
           </a:prstGeom>
           <a:solidFill>
-            <a:srgbClr val="003876"/>
+            <a:srgbClr val="10B981"/>
           </a:solidFill>
           <a:ln>
             <a:noFill/>
@@ -9675,49 +10253,49 @@
       </p:sp>
       <p:sp>
         <p:nvSpPr>
+          <p:cNvPr id="13" name="TextBox 12"/>
+          <p:cNvSpPr txBox="1"/>
+          <p:nvPr/>
+        </p:nvSpPr>
+        <p:spPr>
+          <a:xfrm>
+            <a:off x="457200" y="5486400"/>
+            <a:ext cx="3657600" cy="365760"/>
+          </a:xfrm>
+          <a:prstGeom prst="rect">
+            <a:avLst/>
+          </a:prstGeom>
+          <a:noFill/>
+        </p:spPr>
+        <p:txBody>
+          <a:bodyPr wrap="square">
+            <a:spAutoFit/>
+          </a:bodyPr>
+          <a:lstStyle/>
+          <a:p>
+            <a:pPr algn="l"/>
+            <a:r>
+              <a:rPr sz="1800" b="1">
+                <a:solidFill>
+                  <a:srgbClr val="10B981"/>
+                </a:solidFill>
+                <a:latin typeface="맑은 고딕"/>
+              </a:rPr>
+              <a:t>Database</a:t>
+            </a:r>
+          </a:p>
+        </p:txBody>
+      </p:sp>
+      <p:sp>
+        <p:nvSpPr>
           <p:cNvPr id="14" name="TextBox 13"/>
           <p:cNvSpPr txBox="1"/>
           <p:nvPr/>
         </p:nvSpPr>
         <p:spPr>
           <a:xfrm>
-            <a:off x="6400800" y="2423160"/>
-            <a:ext cx="2011680" cy="457200"/>
-          </a:xfrm>
-          <a:prstGeom prst="rect">
-            <a:avLst/>
-          </a:prstGeom>
-          <a:noFill/>
-        </p:spPr>
-        <p:txBody>
-          <a:bodyPr wrap="square">
-            <a:spAutoFit/>
-          </a:bodyPr>
-          <a:lstStyle/>
-          <a:p>
-            <a:pPr algn="ctr"/>
-            <a:r>
-              <a:rPr sz="1300" b="0">
-                <a:solidFill>
-                  <a:srgbClr val="FFFFFF"/>
-                </a:solidFill>
-                <a:latin typeface="맑은 고딕"/>
-              </a:rPr>
-              <a:t>5월 19일</a:t>
-            </a:r>
-          </a:p>
-        </p:txBody>
-      </p:sp>
-      <p:sp>
-        <p:nvSpPr>
-          <p:cNvPr id="15" name="TextBox 14"/>
-          <p:cNvSpPr txBox="1"/>
-          <p:nvPr/>
-        </p:nvSpPr>
-        <p:spPr>
-          <a:xfrm>
-            <a:off x="8549640" y="2423160"/>
-            <a:ext cx="3474720" cy="457200"/>
+            <a:off x="4114800" y="5486400"/>
+            <a:ext cx="7315200" cy="365760"/>
           </a:xfrm>
           <a:prstGeom prst="rect">
             <a:avLst/>
@@ -9732,33 +10310,33 @@
           <a:p>
             <a:pPr algn="l"/>
             <a:r>
-              <a:rPr sz="1400" b="0">
-                <a:solidFill>
-                  <a:srgbClr val="0F172A"/>
-                </a:solidFill>
-                <a:latin typeface="맑은 고딕"/>
-              </a:rPr>
-              <a:t>예선 결과 발표</a:t>
-            </a:r>
-          </a:p>
-        </p:txBody>
-      </p:sp>
-      <p:sp>
-        <p:nvSpPr>
-          <p:cNvPr id="16" name="Rectangle 15"/>
+              <a:rPr sz="1800" b="0">
+                <a:solidFill>
+                  <a:srgbClr val="F1F5F9"/>
+                </a:solidFill>
+                <a:latin typeface="맑은 고딕"/>
+              </a:rPr>
+              <a:t>PostgreSQL + SQLAlchemy</a:t>
+            </a:r>
+          </a:p>
+        </p:txBody>
+      </p:sp>
+      <p:sp>
+        <p:nvSpPr>
+          <p:cNvPr id="15" name="Rectangle 14"/>
           <p:cNvSpPr/>
           <p:nvPr/>
         </p:nvSpPr>
         <p:spPr>
           <a:xfrm>
-            <a:off x="6400800" y="3017520"/>
-            <a:ext cx="2011680" cy="457200"/>
+            <a:off x="365760" y="7863840"/>
+            <a:ext cx="11430000" cy="54864"/>
           </a:xfrm>
           <a:prstGeom prst="rect">
             <a:avLst/>
           </a:prstGeom>
           <a:solidFill>
-            <a:srgbClr val="003876"/>
+            <a:srgbClr val="10B981"/>
           </a:solidFill>
           <a:ln>
             <a:noFill/>
@@ -9788,35 +10366,70 @@
       </p:sp>
       <p:sp>
         <p:nvSpPr>
+          <p:cNvPr id="16" name="TextBox 15"/>
+          <p:cNvSpPr txBox="1"/>
+          <p:nvPr/>
+        </p:nvSpPr>
+        <p:spPr>
+          <a:xfrm>
+            <a:off x="457200" y="7955280"/>
+            <a:ext cx="3657600" cy="365760"/>
+          </a:xfrm>
+          <a:prstGeom prst="rect">
+            <a:avLst/>
+          </a:prstGeom>
+          <a:noFill/>
+        </p:spPr>
+        <p:txBody>
+          <a:bodyPr wrap="square">
+            <a:spAutoFit/>
+          </a:bodyPr>
+          <a:lstStyle/>
+          <a:p>
+            <a:pPr algn="l"/>
+            <a:r>
+              <a:rPr sz="1800" b="1">
+                <a:solidFill>
+                  <a:srgbClr val="10B981"/>
+                </a:solidFill>
+                <a:latin typeface="맑은 고딕"/>
+              </a:rPr>
+              <a:t>AI Layer</a:t>
+            </a:r>
+          </a:p>
+        </p:txBody>
+      </p:sp>
+      <p:sp>
+        <p:nvSpPr>
           <p:cNvPr id="17" name="TextBox 16"/>
           <p:cNvSpPr txBox="1"/>
           <p:nvPr/>
         </p:nvSpPr>
         <p:spPr>
           <a:xfrm>
-            <a:off x="6400800" y="3017520"/>
-            <a:ext cx="2011680" cy="457200"/>
-          </a:xfrm>
-          <a:prstGeom prst="rect">
-            <a:avLst/>
-          </a:prstGeom>
-          <a:noFill/>
-        </p:spPr>
-        <p:txBody>
-          <a:bodyPr wrap="square">
-            <a:spAutoFit/>
-          </a:bodyPr>
-          <a:lstStyle/>
-          <a:p>
-            <a:pPr algn="ctr"/>
-            <a:r>
-              <a:rPr sz="1300" b="0">
-                <a:solidFill>
-                  <a:srgbClr val="FFFFFF"/>
-                </a:solidFill>
-                <a:latin typeface="맑은 고딕"/>
-              </a:rPr>
-              <a:t>6월 1~4주</a:t>
+            <a:off x="4114800" y="7955280"/>
+            <a:ext cx="7315200" cy="365760"/>
+          </a:xfrm>
+          <a:prstGeom prst="rect">
+            <a:avLst/>
+          </a:prstGeom>
+          <a:noFill/>
+        </p:spPr>
+        <p:txBody>
+          <a:bodyPr wrap="square">
+            <a:spAutoFit/>
+          </a:bodyPr>
+          <a:lstStyle/>
+          <a:p>
+            <a:pPr algn="l"/>
+            <a:r>
+              <a:rPr sz="1800" b="0">
+                <a:solidFill>
+                  <a:srgbClr val="F1F5F9"/>
+                </a:solidFill>
+                <a:latin typeface="맑은 고딕"/>
+              </a:rPr>
+              <a:t>OpenAI API (GPT-4o)</a:t>
             </a:r>
           </a:p>
         </p:txBody>
@@ -9829,481 +10442,29 @@
         </p:nvSpPr>
         <p:spPr>
           <a:xfrm>
-            <a:off x="8549640" y="3017520"/>
-            <a:ext cx="3474720" cy="457200"/>
-          </a:xfrm>
-          <a:prstGeom prst="rect">
-            <a:avLst/>
-          </a:prstGeom>
-          <a:noFill/>
-        </p:spPr>
-        <p:txBody>
-          <a:bodyPr wrap="square">
-            <a:spAutoFit/>
-          </a:bodyPr>
-          <a:lstStyle/>
-          <a:p>
-            <a:pPr algn="l"/>
-            <a:r>
-              <a:rPr sz="1400" b="0">
-                <a:solidFill>
-                  <a:srgbClr val="0F172A"/>
-                </a:solidFill>
-                <a:latin typeface="맑은 고딕"/>
-              </a:rPr>
-              <a:t>수강이력 + AI 연동 구현</a:t>
-            </a:r>
-          </a:p>
-        </p:txBody>
-      </p:sp>
-      <p:sp>
-        <p:nvSpPr>
-          <p:cNvPr id="19" name="Rectangle 18"/>
-          <p:cNvSpPr/>
-          <p:nvPr/>
-        </p:nvSpPr>
-        <p:spPr>
-          <a:xfrm>
-            <a:off x="6400800" y="3611880"/>
-            <a:ext cx="2011680" cy="457200"/>
-          </a:xfrm>
-          <a:prstGeom prst="rect">
-            <a:avLst/>
-          </a:prstGeom>
-          <a:solidFill>
-            <a:srgbClr val="003876"/>
-          </a:solidFill>
-          <a:ln>
-            <a:noFill/>
-          </a:ln>
-        </p:spPr>
-        <p:style>
-          <a:lnRef idx="1">
-            <a:schemeClr val="accent1"/>
-          </a:lnRef>
-          <a:fillRef idx="3">
-            <a:schemeClr val="accent1"/>
-          </a:fillRef>
-          <a:effectRef idx="2">
-            <a:schemeClr val="accent1"/>
-          </a:effectRef>
-          <a:fontRef idx="minor">
-            <a:schemeClr val="lt1"/>
-          </a:fontRef>
-        </p:style>
-        <p:txBody>
-          <a:bodyPr rtlCol="0" anchor="ctr"/>
-          <a:lstStyle/>
-          <a:p>
-            <a:pPr algn="ctr"/>
-          </a:p>
-        </p:txBody>
-      </p:sp>
-      <p:sp>
-        <p:nvSpPr>
-          <p:cNvPr id="20" name="TextBox 19"/>
-          <p:cNvSpPr txBox="1"/>
-          <p:nvPr/>
-        </p:nvSpPr>
-        <p:spPr>
-          <a:xfrm>
-            <a:off x="6400800" y="3611880"/>
-            <a:ext cx="2011680" cy="457200"/>
-          </a:xfrm>
-          <a:prstGeom prst="rect">
-            <a:avLst/>
-          </a:prstGeom>
-          <a:noFill/>
-        </p:spPr>
-        <p:txBody>
-          <a:bodyPr wrap="square">
-            <a:spAutoFit/>
-          </a:bodyPr>
-          <a:lstStyle/>
-          <a:p>
-            <a:pPr algn="ctr"/>
-            <a:r>
-              <a:rPr sz="1300" b="0">
-                <a:solidFill>
-                  <a:srgbClr val="FFFFFF"/>
-                </a:solidFill>
-                <a:latin typeface="맑은 고딕"/>
-              </a:rPr>
-              <a:t>7월 1~2주</a:t>
-            </a:r>
-          </a:p>
-        </p:txBody>
-      </p:sp>
-      <p:sp>
-        <p:nvSpPr>
-          <p:cNvPr id="21" name="TextBox 20"/>
-          <p:cNvSpPr txBox="1"/>
-          <p:nvPr/>
-        </p:nvSpPr>
-        <p:spPr>
-          <a:xfrm>
-            <a:off x="8549640" y="3611880"/>
-            <a:ext cx="3474720" cy="457200"/>
-          </a:xfrm>
-          <a:prstGeom prst="rect">
-            <a:avLst/>
-          </a:prstGeom>
-          <a:noFill/>
-        </p:spPr>
-        <p:txBody>
-          <a:bodyPr wrap="square">
-            <a:spAutoFit/>
-          </a:bodyPr>
-          <a:lstStyle/>
-          <a:p>
-            <a:pPr algn="l"/>
-            <a:r>
-              <a:rPr sz="1400" b="0">
-                <a:solidFill>
-                  <a:srgbClr val="0F172A"/>
-                </a:solidFill>
-                <a:latin typeface="맑은 고딕"/>
-              </a:rPr>
-              <a:t>What-if + 이력서 기능</a:t>
-            </a:r>
-          </a:p>
-        </p:txBody>
-      </p:sp>
-      <p:sp>
-        <p:nvSpPr>
-          <p:cNvPr id="22" name="Rectangle 21"/>
-          <p:cNvSpPr/>
-          <p:nvPr/>
-        </p:nvSpPr>
-        <p:spPr>
-          <a:xfrm>
-            <a:off x="6400800" y="4206240"/>
-            <a:ext cx="2011680" cy="457200"/>
-          </a:xfrm>
-          <a:prstGeom prst="rect">
-            <a:avLst/>
-          </a:prstGeom>
-          <a:solidFill>
-            <a:srgbClr val="003876"/>
-          </a:solidFill>
-          <a:ln>
-            <a:noFill/>
-          </a:ln>
-        </p:spPr>
-        <p:style>
-          <a:lnRef idx="1">
-            <a:schemeClr val="accent1"/>
-          </a:lnRef>
-          <a:fillRef idx="3">
-            <a:schemeClr val="accent1"/>
-          </a:fillRef>
-          <a:effectRef idx="2">
-            <a:schemeClr val="accent1"/>
-          </a:effectRef>
-          <a:fontRef idx="minor">
-            <a:schemeClr val="lt1"/>
-          </a:fontRef>
-        </p:style>
-        <p:txBody>
-          <a:bodyPr rtlCol="0" anchor="ctr"/>
-          <a:lstStyle/>
-          <a:p>
-            <a:pPr algn="ctr"/>
-          </a:p>
-        </p:txBody>
-      </p:sp>
-      <p:sp>
-        <p:nvSpPr>
-          <p:cNvPr id="23" name="TextBox 22"/>
-          <p:cNvSpPr txBox="1"/>
-          <p:nvPr/>
-        </p:nvSpPr>
-        <p:spPr>
-          <a:xfrm>
-            <a:off x="6400800" y="4206240"/>
-            <a:ext cx="2011680" cy="457200"/>
-          </a:xfrm>
-          <a:prstGeom prst="rect">
-            <a:avLst/>
-          </a:prstGeom>
-          <a:noFill/>
-        </p:spPr>
-        <p:txBody>
-          <a:bodyPr wrap="square">
-            <a:spAutoFit/>
-          </a:bodyPr>
-          <a:lstStyle/>
-          <a:p>
-            <a:pPr algn="ctr"/>
-            <a:r>
-              <a:rPr sz="1300" b="0">
-                <a:solidFill>
-                  <a:srgbClr val="FFFFFF"/>
-                </a:solidFill>
-                <a:latin typeface="맑은 고딕"/>
-              </a:rPr>
-              <a:t>7월 3~4주</a:t>
-            </a:r>
-          </a:p>
-        </p:txBody>
-      </p:sp>
-      <p:sp>
-        <p:nvSpPr>
-          <p:cNvPr id="24" name="TextBox 23"/>
-          <p:cNvSpPr txBox="1"/>
-          <p:nvPr/>
-        </p:nvSpPr>
-        <p:spPr>
-          <a:xfrm>
-            <a:off x="8549640" y="4206240"/>
-            <a:ext cx="3474720" cy="457200"/>
-          </a:xfrm>
-          <a:prstGeom prst="rect">
-            <a:avLst/>
-          </a:prstGeom>
-          <a:noFill/>
-        </p:spPr>
-        <p:txBody>
-          <a:bodyPr wrap="square">
-            <a:spAutoFit/>
-          </a:bodyPr>
-          <a:lstStyle/>
-          <a:p>
-            <a:pPr algn="l"/>
-            <a:r>
-              <a:rPr sz="1400" b="0">
-                <a:solidFill>
-                  <a:srgbClr val="0F172A"/>
-                </a:solidFill>
-                <a:latin typeface="맑은 고딕"/>
-              </a:rPr>
-              <a:t>중간보고회 준비</a:t>
-            </a:r>
-          </a:p>
-        </p:txBody>
-      </p:sp>
-      <p:sp>
-        <p:nvSpPr>
-          <p:cNvPr id="25" name="Rectangle 24"/>
-          <p:cNvSpPr/>
-          <p:nvPr/>
-        </p:nvSpPr>
-        <p:spPr>
-          <a:xfrm>
-            <a:off x="6400800" y="4800600"/>
-            <a:ext cx="2011680" cy="457200"/>
-          </a:xfrm>
-          <a:prstGeom prst="rect">
-            <a:avLst/>
-          </a:prstGeom>
-          <a:solidFill>
-            <a:srgbClr val="003876"/>
-          </a:solidFill>
-          <a:ln>
-            <a:noFill/>
-          </a:ln>
-        </p:spPr>
-        <p:style>
-          <a:lnRef idx="1">
-            <a:schemeClr val="accent1"/>
-          </a:lnRef>
-          <a:fillRef idx="3">
-            <a:schemeClr val="accent1"/>
-          </a:fillRef>
-          <a:effectRef idx="2">
-            <a:schemeClr val="accent1"/>
-          </a:effectRef>
-          <a:fontRef idx="minor">
-            <a:schemeClr val="lt1"/>
-          </a:fontRef>
-        </p:style>
-        <p:txBody>
-          <a:bodyPr rtlCol="0" anchor="ctr"/>
-          <a:lstStyle/>
-          <a:p>
-            <a:pPr algn="ctr"/>
-          </a:p>
-        </p:txBody>
-      </p:sp>
-      <p:sp>
-        <p:nvSpPr>
-          <p:cNvPr id="26" name="TextBox 25"/>
-          <p:cNvSpPr txBox="1"/>
-          <p:nvPr/>
-        </p:nvSpPr>
-        <p:spPr>
-          <a:xfrm>
-            <a:off x="6400800" y="4800600"/>
-            <a:ext cx="2011680" cy="457200"/>
-          </a:xfrm>
-          <a:prstGeom prst="rect">
-            <a:avLst/>
-          </a:prstGeom>
-          <a:noFill/>
-        </p:spPr>
-        <p:txBody>
-          <a:bodyPr wrap="square">
-            <a:spAutoFit/>
-          </a:bodyPr>
-          <a:lstStyle/>
-          <a:p>
-            <a:pPr algn="ctr"/>
-            <a:r>
-              <a:rPr sz="1300" b="0">
-                <a:solidFill>
-                  <a:srgbClr val="FFFFFF"/>
-                </a:solidFill>
-                <a:latin typeface="맑은 고딕"/>
-              </a:rPr>
-              <a:t>8월 1~4주</a:t>
-            </a:r>
-          </a:p>
-        </p:txBody>
-      </p:sp>
-      <p:sp>
-        <p:nvSpPr>
-          <p:cNvPr id="27" name="TextBox 26"/>
-          <p:cNvSpPr txBox="1"/>
-          <p:nvPr/>
-        </p:nvSpPr>
-        <p:spPr>
-          <a:xfrm>
-            <a:off x="8549640" y="4800600"/>
-            <a:ext cx="3474720" cy="457200"/>
-          </a:xfrm>
-          <a:prstGeom prst="rect">
-            <a:avLst/>
-          </a:prstGeom>
-          <a:noFill/>
-        </p:spPr>
-        <p:txBody>
-          <a:bodyPr wrap="square">
-            <a:spAutoFit/>
-          </a:bodyPr>
-          <a:lstStyle/>
-          <a:p>
-            <a:pPr algn="l"/>
-            <a:r>
-              <a:rPr sz="1400" b="0">
-                <a:solidFill>
-                  <a:srgbClr val="0F172A"/>
-                </a:solidFill>
-                <a:latin typeface="맑은 고딕"/>
-              </a:rPr>
-              <a:t>최종 마무리 + 배포</a:t>
-            </a:r>
-          </a:p>
-        </p:txBody>
-      </p:sp>
-      <p:sp>
-        <p:nvSpPr>
-          <p:cNvPr id="28" name="Rectangle 27"/>
-          <p:cNvSpPr/>
-          <p:nvPr/>
-        </p:nvSpPr>
-        <p:spPr>
-          <a:xfrm>
-            <a:off x="6400800" y="5394960"/>
-            <a:ext cx="2011680" cy="457200"/>
-          </a:xfrm>
-          <a:prstGeom prst="rect">
-            <a:avLst/>
-          </a:prstGeom>
-          <a:solidFill>
-            <a:srgbClr val="003876"/>
-          </a:solidFill>
-          <a:ln>
-            <a:noFill/>
-          </a:ln>
-        </p:spPr>
-        <p:style>
-          <a:lnRef idx="1">
-            <a:schemeClr val="accent1"/>
-          </a:lnRef>
-          <a:fillRef idx="3">
-            <a:schemeClr val="accent1"/>
-          </a:fillRef>
-          <a:effectRef idx="2">
-            <a:schemeClr val="accent1"/>
-          </a:effectRef>
-          <a:fontRef idx="minor">
-            <a:schemeClr val="lt1"/>
-          </a:fontRef>
-        </p:style>
-        <p:txBody>
-          <a:bodyPr rtlCol="0" anchor="ctr"/>
-          <a:lstStyle/>
-          <a:p>
-            <a:pPr algn="ctr"/>
-          </a:p>
-        </p:txBody>
-      </p:sp>
-      <p:sp>
-        <p:nvSpPr>
-          <p:cNvPr id="29" name="TextBox 28"/>
-          <p:cNvSpPr txBox="1"/>
-          <p:nvPr/>
-        </p:nvSpPr>
-        <p:spPr>
-          <a:xfrm>
-            <a:off x="6400800" y="5394960"/>
-            <a:ext cx="2011680" cy="457200"/>
-          </a:xfrm>
-          <a:prstGeom prst="rect">
-            <a:avLst/>
-          </a:prstGeom>
-          <a:noFill/>
-        </p:spPr>
-        <p:txBody>
-          <a:bodyPr wrap="square">
-            <a:spAutoFit/>
-          </a:bodyPr>
-          <a:lstStyle/>
-          <a:p>
-            <a:pPr algn="ctr"/>
-            <a:r>
-              <a:rPr sz="1300" b="0">
-                <a:solidFill>
-                  <a:srgbClr val="FFFFFF"/>
-                </a:solidFill>
-                <a:latin typeface="맑은 고딕"/>
-              </a:rPr>
-              <a:t>8월 28일</a:t>
-            </a:r>
-          </a:p>
-        </p:txBody>
-      </p:sp>
-      <p:sp>
-        <p:nvSpPr>
-          <p:cNvPr id="30" name="TextBox 29"/>
-          <p:cNvSpPr txBox="1"/>
-          <p:nvPr/>
-        </p:nvSpPr>
-        <p:spPr>
-          <a:xfrm>
-            <a:off x="8549640" y="5394960"/>
-            <a:ext cx="3474720" cy="457200"/>
-          </a:xfrm>
-          <a:prstGeom prst="rect">
-            <a:avLst/>
-          </a:prstGeom>
-          <a:noFill/>
-        </p:spPr>
-        <p:txBody>
-          <a:bodyPr wrap="square">
-            <a:spAutoFit/>
-          </a:bodyPr>
-          <a:lstStyle/>
-          <a:p>
-            <a:pPr algn="l"/>
-            <a:r>
-              <a:rPr sz="1400" b="0">
-                <a:solidFill>
-                  <a:srgbClr val="0F172A"/>
-                </a:solidFill>
-                <a:latin typeface="맑은 고딕"/>
-              </a:rPr>
-              <a:t>최종 발표 (농심호텔)</a:t>
+            <a:off x="457200" y="5760720"/>
+            <a:ext cx="10972800" cy="457200"/>
+          </a:xfrm>
+          <a:prstGeom prst="rect">
+            <a:avLst/>
+          </a:prstGeom>
+          <a:noFill/>
+        </p:spPr>
+        <p:txBody>
+          <a:bodyPr wrap="square">
+            <a:spAutoFit/>
+          </a:bodyPr>
+          <a:lstStyle/>
+          <a:p>
+            <a:pPr algn="ctr"/>
+            <a:r>
+              <a:rPr sz="1800" b="0">
+                <a:solidFill>
+                  <a:srgbClr val="475569"/>
+                </a:solidFill>
+                <a:latin typeface="맑은 고딕"/>
+              </a:rPr>
+              <a:t>배포: Vercel (FE)  +  VPS / Docker (BE)</a:t>
             </a:r>
           </a:p>
         </p:txBody>
@@ -10399,7 +10560,7 @@
                 </a:solidFill>
                 <a:latin typeface="맑은 고딕"/>
               </a:rPr>
-              <a:t>기대효과 &amp; 차별성</a:t>
+              <a:t>MVP 범위 &amp; 개발 일정</a:t>
             </a:r>
           </a:p>
         </p:txBody>
@@ -10434,7 +10595,7 @@
                 </a:solidFill>
                 <a:latin typeface="맑은 고딕"/>
               </a:rPr>
-              <a:t>IMPACT &amp; DIFFERENTIATION</a:t>
+              <a:t>ROADMAP</a:t>
             </a:r>
           </a:p>
         </p:txBody>
@@ -10454,7 +10615,7 @@
             <a:avLst/>
           </a:prstGeom>
           <a:solidFill>
-            <a:srgbClr val="0F172A"/>
+            <a:srgbClr val="F1F5F9"/>
           </a:solidFill>
           <a:ln>
             <a:noFill/>
@@ -10490,7 +10651,7 @@
         </p:nvSpPr>
         <p:spPr>
           <a:xfrm>
-            <a:off x="457200" y="1463040"/>
+            <a:off x="457200" y="1371600"/>
             <a:ext cx="5486400" cy="457200"/>
           </a:xfrm>
           <a:prstGeom prst="rect">
@@ -10506,27 +10667,70 @@
           <a:p>
             <a:pPr algn="l"/>
             <a:r>
-              <a:rPr sz="2200" b="1">
-                <a:solidFill>
-                  <a:srgbClr val="10B981"/>
-                </a:solidFill>
-                <a:latin typeface="맑은 고딕"/>
-              </a:rPr>
-              <a:t>차별성</a:t>
-            </a:r>
-          </a:p>
-        </p:txBody>
-      </p:sp>
-      <p:sp>
-        <p:nvSpPr>
-          <p:cNvPr id="7" name="TextBox 6"/>
-          <p:cNvSpPr txBox="1"/>
-          <p:nvPr/>
-        </p:nvSpPr>
-        <p:spPr>
-          <a:xfrm>
-            <a:off x="640080" y="2194560"/>
-            <a:ext cx="5120640" cy="4023360"/>
+              <a:rPr sz="2000" b="1">
+                <a:solidFill>
+                  <a:srgbClr val="003876"/>
+                </a:solidFill>
+                <a:latin typeface="맑은 고딕"/>
+              </a:rPr>
+              <a:t>우선 구현 기능 (MVP)</a:t>
+            </a:r>
+          </a:p>
+        </p:txBody>
+      </p:sp>
+      <p:sp>
+        <p:nvSpPr>
+          <p:cNvPr id="7" name="Rectangle 6"/>
+          <p:cNvSpPr/>
+          <p:nvPr/>
+        </p:nvSpPr>
+        <p:spPr>
+          <a:xfrm>
+            <a:off x="457200" y="1828800"/>
+            <a:ext cx="5486400" cy="4114800"/>
+          </a:xfrm>
+          <a:prstGeom prst="rect">
+            <a:avLst/>
+          </a:prstGeom>
+          <a:solidFill>
+            <a:srgbClr val="FFFFFF"/>
+          </a:solidFill>
+          <a:ln>
+            <a:noFill/>
+          </a:ln>
+        </p:spPr>
+        <p:style>
+          <a:lnRef idx="1">
+            <a:schemeClr val="accent1"/>
+          </a:lnRef>
+          <a:fillRef idx="3">
+            <a:schemeClr val="accent1"/>
+          </a:fillRef>
+          <a:effectRef idx="2">
+            <a:schemeClr val="accent1"/>
+          </a:effectRef>
+          <a:fontRef idx="minor">
+            <a:schemeClr val="lt1"/>
+          </a:fontRef>
+        </p:style>
+        <p:txBody>
+          <a:bodyPr rtlCol="0" anchor="ctr"/>
+          <a:lstStyle/>
+          <a:p>
+            <a:pPr algn="ctr"/>
+          </a:p>
+        </p:txBody>
+      </p:sp>
+      <p:sp>
+        <p:nvSpPr>
+          <p:cNvPr id="8" name="TextBox 7"/>
+          <p:cNvSpPr txBox="1"/>
+          <p:nvPr/>
+        </p:nvSpPr>
+        <p:spPr>
+          <a:xfrm>
+            <a:off x="640080" y="2011680"/>
+            <a:ext cx="5120640" cy="3749040"/>
           </a:xfrm>
           <a:prstGeom prst="rect">
             <a:avLst/>
@@ -10543,73 +10747,650 @@
             <a:r>
               <a:rPr sz="1600">
                 <a:solidFill>
+                  <a:srgbClr val="0F172A"/>
+                </a:solidFill>
+                <a:latin typeface="맑은 고딕"/>
+              </a:rPr>
+              <a:t>  ✅ 학생 회원가입 / 로그인 (완성)</a:t>
+            </a:r>
+          </a:p>
+          <a:p>
+            <a:pPr algn="l"/>
+            <a:r>
+              <a:rPr sz="1600">
+                <a:solidFill>
+                  <a:srgbClr val="0F172A"/>
+                </a:solidFill>
+                <a:latin typeface="맑은 고딕"/>
+              </a:rPr>
+              <a:t>  ✅ 학과별 졸업요건 DB + 관리자 CRUD (완성)</a:t>
+            </a:r>
+          </a:p>
+          <a:p>
+            <a:pPr algn="l"/>
+            <a:r>
+              <a:rPr sz="1600">
+                <a:solidFill>
+                  <a:srgbClr val="0F172A"/>
+                </a:solidFill>
+                <a:latin typeface="맑은 고딕"/>
+              </a:rPr>
+              <a:t>  🔄 수강 이력 입력 및 조회</a:t>
+            </a:r>
+          </a:p>
+          <a:p>
+            <a:pPr algn="l"/>
+            <a:r>
+              <a:rPr sz="1600">
+                <a:solidFill>
+                  <a:srgbClr val="0F172A"/>
+                </a:solidFill>
+                <a:latin typeface="맑은 고딕"/>
+              </a:rPr>
+              <a:t>  🔄 졸업요건 충족률 계산 대시보드</a:t>
+            </a:r>
+          </a:p>
+          <a:p>
+            <a:pPr algn="l"/>
+            <a:r>
+              <a:rPr sz="1600">
+                <a:solidFill>
+                  <a:srgbClr val="0F172A"/>
+                </a:solidFill>
+                <a:latin typeface="맑은 고딕"/>
+              </a:rPr>
+              <a:t>  🔄 AI 챗봇 (OpenAI 연동)</a:t>
+            </a:r>
+          </a:p>
+          <a:p>
+            <a:pPr algn="l"/>
+            <a:r>
+              <a:rPr sz="1600">
+                <a:solidFill>
+                  <a:srgbClr val="0F172A"/>
+                </a:solidFill>
+                <a:latin typeface="맑은 고딕"/>
+              </a:rPr>
+              <a:t>  🔄 다음 학기 수강 추천 로직</a:t>
+            </a:r>
+          </a:p>
+        </p:txBody>
+      </p:sp>
+      <p:sp>
+        <p:nvSpPr>
+          <p:cNvPr id="9" name="TextBox 8"/>
+          <p:cNvSpPr txBox="1"/>
+          <p:nvPr/>
+        </p:nvSpPr>
+        <p:spPr>
+          <a:xfrm>
+            <a:off x="6400800" y="1371600"/>
+            <a:ext cx="5486400" cy="457200"/>
+          </a:xfrm>
+          <a:prstGeom prst="rect">
+            <a:avLst/>
+          </a:prstGeom>
+          <a:noFill/>
+        </p:spPr>
+        <p:txBody>
+          <a:bodyPr wrap="square">
+            <a:spAutoFit/>
+          </a:bodyPr>
+          <a:lstStyle/>
+          <a:p>
+            <a:pPr algn="l"/>
+            <a:r>
+              <a:rPr sz="2000" b="1">
+                <a:solidFill>
+                  <a:srgbClr val="003876"/>
+                </a:solidFill>
+                <a:latin typeface="맑은 고딕"/>
+              </a:rPr>
+              <a:t>개발 일정</a:t>
+            </a:r>
+          </a:p>
+        </p:txBody>
+      </p:sp>
+      <p:sp>
+        <p:nvSpPr>
+          <p:cNvPr id="10" name="Rectangle 9"/>
+          <p:cNvSpPr/>
+          <p:nvPr/>
+        </p:nvSpPr>
+        <p:spPr>
+          <a:xfrm>
+            <a:off x="6400800" y="1828800"/>
+            <a:ext cx="2011680" cy="457200"/>
+          </a:xfrm>
+          <a:prstGeom prst="rect">
+            <a:avLst/>
+          </a:prstGeom>
+          <a:solidFill>
+            <a:srgbClr val="003876"/>
+          </a:solidFill>
+          <a:ln>
+            <a:noFill/>
+          </a:ln>
+        </p:spPr>
+        <p:style>
+          <a:lnRef idx="1">
+            <a:schemeClr val="accent1"/>
+          </a:lnRef>
+          <a:fillRef idx="3">
+            <a:schemeClr val="accent1"/>
+          </a:fillRef>
+          <a:effectRef idx="2">
+            <a:schemeClr val="accent1"/>
+          </a:effectRef>
+          <a:fontRef idx="minor">
+            <a:schemeClr val="lt1"/>
+          </a:fontRef>
+        </p:style>
+        <p:txBody>
+          <a:bodyPr rtlCol="0" anchor="ctr"/>
+          <a:lstStyle/>
+          <a:p>
+            <a:pPr algn="ctr"/>
+          </a:p>
+        </p:txBody>
+      </p:sp>
+      <p:sp>
+        <p:nvSpPr>
+          <p:cNvPr id="11" name="TextBox 10"/>
+          <p:cNvSpPr txBox="1"/>
+          <p:nvPr/>
+        </p:nvSpPr>
+        <p:spPr>
+          <a:xfrm>
+            <a:off x="6400800" y="1828800"/>
+            <a:ext cx="2011680" cy="457200"/>
+          </a:xfrm>
+          <a:prstGeom prst="rect">
+            <a:avLst/>
+          </a:prstGeom>
+          <a:noFill/>
+        </p:spPr>
+        <p:txBody>
+          <a:bodyPr wrap="square">
+            <a:spAutoFit/>
+          </a:bodyPr>
+          <a:lstStyle/>
+          <a:p>
+            <a:pPr algn="ctr"/>
+            <a:r>
+              <a:rPr sz="1300" b="0">
+                <a:solidFill>
                   <a:srgbClr val="FFFFFF"/>
                 </a:solidFill>
                 <a:latin typeface="맑은 고딕"/>
               </a:rPr>
-              <a:t>•  학업·졸업·진로·이력서를 하나의 플랫폼에서 통합 관리</a:t>
-            </a:r>
-          </a:p>
+              <a:t>5월 4~11일</a:t>
+            </a:r>
+          </a:p>
+        </p:txBody>
+      </p:sp>
+      <p:sp>
+        <p:nvSpPr>
+          <p:cNvPr id="12" name="TextBox 11"/>
+          <p:cNvSpPr txBox="1"/>
+          <p:nvPr/>
+        </p:nvSpPr>
+        <p:spPr>
+          <a:xfrm>
+            <a:off x="8549640" y="1828800"/>
+            <a:ext cx="3474720" cy="457200"/>
+          </a:xfrm>
+          <a:prstGeom prst="rect">
+            <a:avLst/>
+          </a:prstGeom>
+          <a:noFill/>
+        </p:spPr>
+        <p:txBody>
+          <a:bodyPr wrap="square">
+            <a:spAutoFit/>
+          </a:bodyPr>
+          <a:lstStyle/>
           <a:p>
             <a:pPr algn="l"/>
             <a:r>
-              <a:rPr sz="1600">
+              <a:rPr sz="1400" b="0">
+                <a:solidFill>
+                  <a:srgbClr val="0F172A"/>
+                </a:solidFill>
+                <a:latin typeface="맑은 고딕"/>
+              </a:rPr>
+              <a:t>예선 서류 제출</a:t>
+            </a:r>
+          </a:p>
+        </p:txBody>
+      </p:sp>
+      <p:sp>
+        <p:nvSpPr>
+          <p:cNvPr id="13" name="Rectangle 12"/>
+          <p:cNvSpPr/>
+          <p:nvPr/>
+        </p:nvSpPr>
+        <p:spPr>
+          <a:xfrm>
+            <a:off x="6400800" y="2423160"/>
+            <a:ext cx="2011680" cy="457200"/>
+          </a:xfrm>
+          <a:prstGeom prst="rect">
+            <a:avLst/>
+          </a:prstGeom>
+          <a:solidFill>
+            <a:srgbClr val="003876"/>
+          </a:solidFill>
+          <a:ln>
+            <a:noFill/>
+          </a:ln>
+        </p:spPr>
+        <p:style>
+          <a:lnRef idx="1">
+            <a:schemeClr val="accent1"/>
+          </a:lnRef>
+          <a:fillRef idx="3">
+            <a:schemeClr val="accent1"/>
+          </a:fillRef>
+          <a:effectRef idx="2">
+            <a:schemeClr val="accent1"/>
+          </a:effectRef>
+          <a:fontRef idx="minor">
+            <a:schemeClr val="lt1"/>
+          </a:fontRef>
+        </p:style>
+        <p:txBody>
+          <a:bodyPr rtlCol="0" anchor="ctr"/>
+          <a:lstStyle/>
+          <a:p>
+            <a:pPr algn="ctr"/>
+          </a:p>
+        </p:txBody>
+      </p:sp>
+      <p:sp>
+        <p:nvSpPr>
+          <p:cNvPr id="14" name="TextBox 13"/>
+          <p:cNvSpPr txBox="1"/>
+          <p:nvPr/>
+        </p:nvSpPr>
+        <p:spPr>
+          <a:xfrm>
+            <a:off x="6400800" y="2423160"/>
+            <a:ext cx="2011680" cy="457200"/>
+          </a:xfrm>
+          <a:prstGeom prst="rect">
+            <a:avLst/>
+          </a:prstGeom>
+          <a:noFill/>
+        </p:spPr>
+        <p:txBody>
+          <a:bodyPr wrap="square">
+            <a:spAutoFit/>
+          </a:bodyPr>
+          <a:lstStyle/>
+          <a:p>
+            <a:pPr algn="ctr"/>
+            <a:r>
+              <a:rPr sz="1300" b="0">
                 <a:solidFill>
                   <a:srgbClr val="FFFFFF"/>
                 </a:solidFill>
                 <a:latin typeface="맑은 고딕"/>
               </a:rPr>
-              <a:t>•  학생별 이수 현황 기반 맞춤형 수강 로드맵</a:t>
-            </a:r>
-          </a:p>
+              <a:t>5월 19일</a:t>
+            </a:r>
+          </a:p>
+        </p:txBody>
+      </p:sp>
+      <p:sp>
+        <p:nvSpPr>
+          <p:cNvPr id="15" name="TextBox 14"/>
+          <p:cNvSpPr txBox="1"/>
+          <p:nvPr/>
+        </p:nvSpPr>
+        <p:spPr>
+          <a:xfrm>
+            <a:off x="8549640" y="2423160"/>
+            <a:ext cx="3474720" cy="457200"/>
+          </a:xfrm>
+          <a:prstGeom prst="rect">
+            <a:avLst/>
+          </a:prstGeom>
+          <a:noFill/>
+        </p:spPr>
+        <p:txBody>
+          <a:bodyPr wrap="square">
+            <a:spAutoFit/>
+          </a:bodyPr>
+          <a:lstStyle/>
           <a:p>
             <a:pPr algn="l"/>
             <a:r>
-              <a:rPr sz="1600">
+              <a:rPr sz="1400" b="0">
+                <a:solidFill>
+                  <a:srgbClr val="0F172A"/>
+                </a:solidFill>
+                <a:latin typeface="맑은 고딕"/>
+              </a:rPr>
+              <a:t>예선 결과 발표</a:t>
+            </a:r>
+          </a:p>
+        </p:txBody>
+      </p:sp>
+      <p:sp>
+        <p:nvSpPr>
+          <p:cNvPr id="16" name="Rectangle 15"/>
+          <p:cNvSpPr/>
+          <p:nvPr/>
+        </p:nvSpPr>
+        <p:spPr>
+          <a:xfrm>
+            <a:off x="6400800" y="3017520"/>
+            <a:ext cx="2011680" cy="457200"/>
+          </a:xfrm>
+          <a:prstGeom prst="rect">
+            <a:avLst/>
+          </a:prstGeom>
+          <a:solidFill>
+            <a:srgbClr val="003876"/>
+          </a:solidFill>
+          <a:ln>
+            <a:noFill/>
+          </a:ln>
+        </p:spPr>
+        <p:style>
+          <a:lnRef idx="1">
+            <a:schemeClr val="accent1"/>
+          </a:lnRef>
+          <a:fillRef idx="3">
+            <a:schemeClr val="accent1"/>
+          </a:fillRef>
+          <a:effectRef idx="2">
+            <a:schemeClr val="accent1"/>
+          </a:effectRef>
+          <a:fontRef idx="minor">
+            <a:schemeClr val="lt1"/>
+          </a:fontRef>
+        </p:style>
+        <p:txBody>
+          <a:bodyPr rtlCol="0" anchor="ctr"/>
+          <a:lstStyle/>
+          <a:p>
+            <a:pPr algn="ctr"/>
+          </a:p>
+        </p:txBody>
+      </p:sp>
+      <p:sp>
+        <p:nvSpPr>
+          <p:cNvPr id="17" name="TextBox 16"/>
+          <p:cNvSpPr txBox="1"/>
+          <p:nvPr/>
+        </p:nvSpPr>
+        <p:spPr>
+          <a:xfrm>
+            <a:off x="6400800" y="3017520"/>
+            <a:ext cx="2011680" cy="457200"/>
+          </a:xfrm>
+          <a:prstGeom prst="rect">
+            <a:avLst/>
+          </a:prstGeom>
+          <a:noFill/>
+        </p:spPr>
+        <p:txBody>
+          <a:bodyPr wrap="square">
+            <a:spAutoFit/>
+          </a:bodyPr>
+          <a:lstStyle/>
+          <a:p>
+            <a:pPr algn="ctr"/>
+            <a:r>
+              <a:rPr sz="1300" b="0">
                 <a:solidFill>
                   <a:srgbClr val="FFFFFF"/>
                 </a:solidFill>
                 <a:latin typeface="맑은 고딕"/>
               </a:rPr>
-              <a:t>•  정형 데이터 분석 + 생성형 AI 설명 결합 (신뢰성 확보)</a:t>
-            </a:r>
-          </a:p>
+              <a:t>6월 1~4주</a:t>
+            </a:r>
+          </a:p>
+        </p:txBody>
+      </p:sp>
+      <p:sp>
+        <p:nvSpPr>
+          <p:cNvPr id="18" name="TextBox 17"/>
+          <p:cNvSpPr txBox="1"/>
+          <p:nvPr/>
+        </p:nvSpPr>
+        <p:spPr>
+          <a:xfrm>
+            <a:off x="8549640" y="3017520"/>
+            <a:ext cx="3474720" cy="457200"/>
+          </a:xfrm>
+          <a:prstGeom prst="rect">
+            <a:avLst/>
+          </a:prstGeom>
+          <a:noFill/>
+        </p:spPr>
+        <p:txBody>
+          <a:bodyPr wrap="square">
+            <a:spAutoFit/>
+          </a:bodyPr>
+          <a:lstStyle/>
           <a:p>
             <a:pPr algn="l"/>
             <a:r>
-              <a:rPr sz="1600">
+              <a:rPr sz="1400" b="0">
+                <a:solidFill>
+                  <a:srgbClr val="0F172A"/>
+                </a:solidFill>
+                <a:latin typeface="맑은 고딕"/>
+              </a:rPr>
+              <a:t>수강이력 + AI 연동 구현</a:t>
+            </a:r>
+          </a:p>
+        </p:txBody>
+      </p:sp>
+      <p:sp>
+        <p:nvSpPr>
+          <p:cNvPr id="19" name="Rectangle 18"/>
+          <p:cNvSpPr/>
+          <p:nvPr/>
+        </p:nvSpPr>
+        <p:spPr>
+          <a:xfrm>
+            <a:off x="6400800" y="3611880"/>
+            <a:ext cx="2011680" cy="457200"/>
+          </a:xfrm>
+          <a:prstGeom prst="rect">
+            <a:avLst/>
+          </a:prstGeom>
+          <a:solidFill>
+            <a:srgbClr val="003876"/>
+          </a:solidFill>
+          <a:ln>
+            <a:noFill/>
+          </a:ln>
+        </p:spPr>
+        <p:style>
+          <a:lnRef idx="1">
+            <a:schemeClr val="accent1"/>
+          </a:lnRef>
+          <a:fillRef idx="3">
+            <a:schemeClr val="accent1"/>
+          </a:fillRef>
+          <a:effectRef idx="2">
+            <a:schemeClr val="accent1"/>
+          </a:effectRef>
+          <a:fontRef idx="minor">
+            <a:schemeClr val="lt1"/>
+          </a:fontRef>
+        </p:style>
+        <p:txBody>
+          <a:bodyPr rtlCol="0" anchor="ctr"/>
+          <a:lstStyle/>
+          <a:p>
+            <a:pPr algn="ctr"/>
+          </a:p>
+        </p:txBody>
+      </p:sp>
+      <p:sp>
+        <p:nvSpPr>
+          <p:cNvPr id="20" name="TextBox 19"/>
+          <p:cNvSpPr txBox="1"/>
+          <p:nvPr/>
+        </p:nvSpPr>
+        <p:spPr>
+          <a:xfrm>
+            <a:off x="6400800" y="3611880"/>
+            <a:ext cx="2011680" cy="457200"/>
+          </a:xfrm>
+          <a:prstGeom prst="rect">
+            <a:avLst/>
+          </a:prstGeom>
+          <a:noFill/>
+        </p:spPr>
+        <p:txBody>
+          <a:bodyPr wrap="square">
+            <a:spAutoFit/>
+          </a:bodyPr>
+          <a:lstStyle/>
+          <a:p>
+            <a:pPr algn="ctr"/>
+            <a:r>
+              <a:rPr sz="1300" b="0">
                 <a:solidFill>
                   <a:srgbClr val="FFFFFF"/>
                 </a:solidFill>
                 <a:latin typeface="맑은 고딕"/>
               </a:rPr>
-              <a:t>•  정적 PDF가 아닌 인터랙티브 로드맵 UI</a:t>
-            </a:r>
-          </a:p>
+              <a:t>7월 1~2주</a:t>
+            </a:r>
+          </a:p>
+        </p:txBody>
+      </p:sp>
+      <p:sp>
+        <p:nvSpPr>
+          <p:cNvPr id="21" name="TextBox 20"/>
+          <p:cNvSpPr txBox="1"/>
+          <p:nvPr/>
+        </p:nvSpPr>
+        <p:spPr>
+          <a:xfrm>
+            <a:off x="8549640" y="3611880"/>
+            <a:ext cx="3474720" cy="457200"/>
+          </a:xfrm>
+          <a:prstGeom prst="rect">
+            <a:avLst/>
+          </a:prstGeom>
+          <a:noFill/>
+        </p:spPr>
+        <p:txBody>
+          <a:bodyPr wrap="square">
+            <a:spAutoFit/>
+          </a:bodyPr>
+          <a:lstStyle/>
           <a:p>
             <a:pPr algn="l"/>
             <a:r>
-              <a:rPr sz="1600">
+              <a:rPr sz="1400" b="0">
+                <a:solidFill>
+                  <a:srgbClr val="0F172A"/>
+                </a:solidFill>
+                <a:latin typeface="맑은 고딕"/>
+              </a:rPr>
+              <a:t>What-if + 이력서 기능</a:t>
+            </a:r>
+          </a:p>
+        </p:txBody>
+      </p:sp>
+      <p:sp>
+        <p:nvSpPr>
+          <p:cNvPr id="22" name="Rectangle 21"/>
+          <p:cNvSpPr/>
+          <p:nvPr/>
+        </p:nvSpPr>
+        <p:spPr>
+          <a:xfrm>
+            <a:off x="6400800" y="4206240"/>
+            <a:ext cx="2011680" cy="457200"/>
+          </a:xfrm>
+          <a:prstGeom prst="rect">
+            <a:avLst/>
+          </a:prstGeom>
+          <a:solidFill>
+            <a:srgbClr val="003876"/>
+          </a:solidFill>
+          <a:ln>
+            <a:noFill/>
+          </a:ln>
+        </p:spPr>
+        <p:style>
+          <a:lnRef idx="1">
+            <a:schemeClr val="accent1"/>
+          </a:lnRef>
+          <a:fillRef idx="3">
+            <a:schemeClr val="accent1"/>
+          </a:fillRef>
+          <a:effectRef idx="2">
+            <a:schemeClr val="accent1"/>
+          </a:effectRef>
+          <a:fontRef idx="minor">
+            <a:schemeClr val="lt1"/>
+          </a:fontRef>
+        </p:style>
+        <p:txBody>
+          <a:bodyPr rtlCol="0" anchor="ctr"/>
+          <a:lstStyle/>
+          <a:p>
+            <a:pPr algn="ctr"/>
+          </a:p>
+        </p:txBody>
+      </p:sp>
+      <p:sp>
+        <p:nvSpPr>
+          <p:cNvPr id="23" name="TextBox 22"/>
+          <p:cNvSpPr txBox="1"/>
+          <p:nvPr/>
+        </p:nvSpPr>
+        <p:spPr>
+          <a:xfrm>
+            <a:off x="6400800" y="4206240"/>
+            <a:ext cx="2011680" cy="457200"/>
+          </a:xfrm>
+          <a:prstGeom prst="rect">
+            <a:avLst/>
+          </a:prstGeom>
+          <a:noFill/>
+        </p:spPr>
+        <p:txBody>
+          <a:bodyPr wrap="square">
+            <a:spAutoFit/>
+          </a:bodyPr>
+          <a:lstStyle/>
+          <a:p>
+            <a:pPr algn="ctr"/>
+            <a:r>
+              <a:rPr sz="1300" b="0">
                 <a:solidFill>
                   <a:srgbClr val="FFFFFF"/>
                 </a:solidFill>
                 <a:latin typeface="맑은 고딕"/>
               </a:rPr>
-              <a:t>•  복수전공·전과 시나리오 분석 지원</a:t>
-            </a:r>
-          </a:p>
-        </p:txBody>
-      </p:sp>
-      <p:sp>
-        <p:nvSpPr>
-          <p:cNvPr id="8" name="TextBox 7"/>
-          <p:cNvSpPr txBox="1"/>
-          <p:nvPr/>
-        </p:nvSpPr>
-        <p:spPr>
-          <a:xfrm>
-            <a:off x="6400800" y="1463040"/>
-            <a:ext cx="5486400" cy="457200"/>
+              <a:t>7월 3~4주</a:t>
+            </a:r>
+          </a:p>
+        </p:txBody>
+      </p:sp>
+      <p:sp>
+        <p:nvSpPr>
+          <p:cNvPr id="24" name="TextBox 23"/>
+          <p:cNvSpPr txBox="1"/>
+          <p:nvPr/>
+        </p:nvSpPr>
+        <p:spPr>
+          <a:xfrm>
+            <a:off x="8549640" y="4206240"/>
+            <a:ext cx="3474720" cy="457200"/>
           </a:xfrm>
           <a:prstGeom prst="rect">
             <a:avLst/>
@@ -10624,27 +11405,105 @@
           <a:p>
             <a:pPr algn="l"/>
             <a:r>
-              <a:rPr sz="2200" b="1">
-                <a:solidFill>
-                  <a:srgbClr val="10B981"/>
-                </a:solidFill>
-                <a:latin typeface="맑은 고딕"/>
-              </a:rPr>
-              <a:t>기대효과</a:t>
-            </a:r>
-          </a:p>
-        </p:txBody>
-      </p:sp>
-      <p:sp>
-        <p:nvSpPr>
-          <p:cNvPr id="9" name="TextBox 8"/>
-          <p:cNvSpPr txBox="1"/>
-          <p:nvPr/>
-        </p:nvSpPr>
-        <p:spPr>
-          <a:xfrm>
-            <a:off x="6583680" y="2194560"/>
-            <a:ext cx="5120640" cy="4023360"/>
+              <a:rPr sz="1400" b="0">
+                <a:solidFill>
+                  <a:srgbClr val="0F172A"/>
+                </a:solidFill>
+                <a:latin typeface="맑은 고딕"/>
+              </a:rPr>
+              <a:t>중간보고회 준비</a:t>
+            </a:r>
+          </a:p>
+        </p:txBody>
+      </p:sp>
+      <p:sp>
+        <p:nvSpPr>
+          <p:cNvPr id="25" name="Rectangle 24"/>
+          <p:cNvSpPr/>
+          <p:nvPr/>
+        </p:nvSpPr>
+        <p:spPr>
+          <a:xfrm>
+            <a:off x="6400800" y="4800600"/>
+            <a:ext cx="2011680" cy="457200"/>
+          </a:xfrm>
+          <a:prstGeom prst="rect">
+            <a:avLst/>
+          </a:prstGeom>
+          <a:solidFill>
+            <a:srgbClr val="003876"/>
+          </a:solidFill>
+          <a:ln>
+            <a:noFill/>
+          </a:ln>
+        </p:spPr>
+        <p:style>
+          <a:lnRef idx="1">
+            <a:schemeClr val="accent1"/>
+          </a:lnRef>
+          <a:fillRef idx="3">
+            <a:schemeClr val="accent1"/>
+          </a:fillRef>
+          <a:effectRef idx="2">
+            <a:schemeClr val="accent1"/>
+          </a:effectRef>
+          <a:fontRef idx="minor">
+            <a:schemeClr val="lt1"/>
+          </a:fontRef>
+        </p:style>
+        <p:txBody>
+          <a:bodyPr rtlCol="0" anchor="ctr"/>
+          <a:lstStyle/>
+          <a:p>
+            <a:pPr algn="ctr"/>
+          </a:p>
+        </p:txBody>
+      </p:sp>
+      <p:sp>
+        <p:nvSpPr>
+          <p:cNvPr id="26" name="TextBox 25"/>
+          <p:cNvSpPr txBox="1"/>
+          <p:nvPr/>
+        </p:nvSpPr>
+        <p:spPr>
+          <a:xfrm>
+            <a:off x="6400800" y="4800600"/>
+            <a:ext cx="2011680" cy="457200"/>
+          </a:xfrm>
+          <a:prstGeom prst="rect">
+            <a:avLst/>
+          </a:prstGeom>
+          <a:noFill/>
+        </p:spPr>
+        <p:txBody>
+          <a:bodyPr wrap="square">
+            <a:spAutoFit/>
+          </a:bodyPr>
+          <a:lstStyle/>
+          <a:p>
+            <a:pPr algn="ctr"/>
+            <a:r>
+              <a:rPr sz="1300" b="0">
+                <a:solidFill>
+                  <a:srgbClr val="FFFFFF"/>
+                </a:solidFill>
+                <a:latin typeface="맑은 고딕"/>
+              </a:rPr>
+              <a:t>8월 1~4주</a:t>
+            </a:r>
+          </a:p>
+        </p:txBody>
+      </p:sp>
+      <p:sp>
+        <p:nvSpPr>
+          <p:cNvPr id="27" name="TextBox 26"/>
+          <p:cNvSpPr txBox="1"/>
+          <p:nvPr/>
+        </p:nvSpPr>
+        <p:spPr>
+          <a:xfrm>
+            <a:off x="8549640" y="4800600"/>
+            <a:ext cx="3474720" cy="457200"/>
           </a:xfrm>
           <a:prstGeom prst="rect">
             <a:avLst/>
@@ -10659,61 +11518,126 @@
           <a:p>
             <a:pPr algn="l"/>
             <a:r>
-              <a:rPr sz="1600">
+              <a:rPr sz="1400" b="0">
+                <a:solidFill>
+                  <a:srgbClr val="0F172A"/>
+                </a:solidFill>
+                <a:latin typeface="맑은 고딕"/>
+              </a:rPr>
+              <a:t>최종 마무리 + 배포</a:t>
+            </a:r>
+          </a:p>
+        </p:txBody>
+      </p:sp>
+      <p:sp>
+        <p:nvSpPr>
+          <p:cNvPr id="28" name="Rectangle 27"/>
+          <p:cNvSpPr/>
+          <p:nvPr/>
+        </p:nvSpPr>
+        <p:spPr>
+          <a:xfrm>
+            <a:off x="6400800" y="5394960"/>
+            <a:ext cx="2011680" cy="457200"/>
+          </a:xfrm>
+          <a:prstGeom prst="rect">
+            <a:avLst/>
+          </a:prstGeom>
+          <a:solidFill>
+            <a:srgbClr val="003876"/>
+          </a:solidFill>
+          <a:ln>
+            <a:noFill/>
+          </a:ln>
+        </p:spPr>
+        <p:style>
+          <a:lnRef idx="1">
+            <a:schemeClr val="accent1"/>
+          </a:lnRef>
+          <a:fillRef idx="3">
+            <a:schemeClr val="accent1"/>
+          </a:fillRef>
+          <a:effectRef idx="2">
+            <a:schemeClr val="accent1"/>
+          </a:effectRef>
+          <a:fontRef idx="minor">
+            <a:schemeClr val="lt1"/>
+          </a:fontRef>
+        </p:style>
+        <p:txBody>
+          <a:bodyPr rtlCol="0" anchor="ctr"/>
+          <a:lstStyle/>
+          <a:p>
+            <a:pPr algn="ctr"/>
+          </a:p>
+        </p:txBody>
+      </p:sp>
+      <p:sp>
+        <p:nvSpPr>
+          <p:cNvPr id="29" name="TextBox 28"/>
+          <p:cNvSpPr txBox="1"/>
+          <p:nvPr/>
+        </p:nvSpPr>
+        <p:spPr>
+          <a:xfrm>
+            <a:off x="6400800" y="5394960"/>
+            <a:ext cx="2011680" cy="457200"/>
+          </a:xfrm>
+          <a:prstGeom prst="rect">
+            <a:avLst/>
+          </a:prstGeom>
+          <a:noFill/>
+        </p:spPr>
+        <p:txBody>
+          <a:bodyPr wrap="square">
+            <a:spAutoFit/>
+          </a:bodyPr>
+          <a:lstStyle/>
+          <a:p>
+            <a:pPr algn="ctr"/>
+            <a:r>
+              <a:rPr sz="1300" b="0">
                 <a:solidFill>
                   <a:srgbClr val="FFFFFF"/>
                 </a:solidFill>
                 <a:latin typeface="맑은 고딕"/>
               </a:rPr>
-              <a:t>•  수강 계획 수립 시간 단축</a:t>
-            </a:r>
-          </a:p>
+              <a:t>8월 28일</a:t>
+            </a:r>
+          </a:p>
+        </p:txBody>
+      </p:sp>
+      <p:sp>
+        <p:nvSpPr>
+          <p:cNvPr id="30" name="TextBox 29"/>
+          <p:cNvSpPr txBox="1"/>
+          <p:nvPr/>
+        </p:nvSpPr>
+        <p:spPr>
+          <a:xfrm>
+            <a:off x="8549640" y="5394960"/>
+            <a:ext cx="3474720" cy="457200"/>
+          </a:xfrm>
+          <a:prstGeom prst="rect">
+            <a:avLst/>
+          </a:prstGeom>
+          <a:noFill/>
+        </p:spPr>
+        <p:txBody>
+          <a:bodyPr wrap="square">
+            <a:spAutoFit/>
+          </a:bodyPr>
+          <a:lstStyle/>
           <a:p>
             <a:pPr algn="l"/>
             <a:r>
-              <a:rPr sz="1600">
-                <a:solidFill>
-                  <a:srgbClr val="FFFFFF"/>
-                </a:solidFill>
-                <a:latin typeface="맑은 고딕"/>
-              </a:rPr>
-              <a:t>•  졸업요건 누락 방지</a:t>
-            </a:r>
-          </a:p>
-          <a:p>
-            <a:pPr algn="l"/>
-            <a:r>
-              <a:rPr sz="1600">
-                <a:solidFill>
-                  <a:srgbClr val="FFFFFF"/>
-                </a:solidFill>
-                <a:latin typeface="맑은 고딕"/>
-              </a:rPr>
-              <a:t>•  진로 준비 체계화</a:t>
-            </a:r>
-          </a:p>
-          <a:p>
-            <a:pPr algn="l"/>
-            <a:r>
-              <a:rPr sz="1600">
-                <a:solidFill>
-                  <a:srgbClr val="FFFFFF"/>
-                </a:solidFill>
-                <a:latin typeface="맑은 고딕"/>
-              </a:rPr>
-              <a:t>•  편입·복학생 적응 지원</a:t>
-            </a:r>
-          </a:p>
-          <a:p>
-            <a:pPr algn="l"/>
-            <a:r>
-              <a:rPr sz="1600">
-                <a:solidFill>
-                  <a:srgbClr val="FFFFFF"/>
-                </a:solidFill>
-                <a:latin typeface="맑은 고딕"/>
-              </a:rPr>
-              <a:t>•  취업 자료 정리 부담 완화</a:t>
+              <a:rPr sz="1400" b="0">
+                <a:solidFill>
+                  <a:srgbClr val="0F172A"/>
+                </a:solidFill>
+                <a:latin typeface="맑은 고딕"/>
+              </a:rPr>
+              <a:t>최종 발표 (농심호텔)</a:t>
             </a:r>
           </a:p>
         </p:txBody>
